--- a/AutomaTivio/saida/2026-08/pptx/Tivio ALT Light - Relatório de Gestão - Agosto 2026.pptx
+++ b/AutomaTivio/saida/2026-08/pptx/Tivio ALT Light - Relatório de Gestão - Agosto 2026.pptx
@@ -4722,7 +4722,7 @@
         </p:nvGraphicFramePr>
         <p:xfrm>
           <a:off x="3924000.0" y="4626000"/>
-          <a:ext cx="3096000" cy="1123200"/>
+          <a:ext cx="3096000" cy="2433600"/>
         </p:xfrm>
         <a:graphic>
           <a:graphicData uri="http://schemas.openxmlformats.org/drawingml/2006/table">
@@ -4988,13 +4988,349 @@
                           </a:solidFill>
                           <a:latin typeface="Versos"/>
                         </a:rPr>
+                        <a:t>Crédito PF</a:t>
+                      </a:r>
+                    </a:p>
+                  </a:txBody>
+                  <a:tcPr marL="43200" marR="43200" marT="0" marB="0">
+                    <a:solidFill>
+                      <a:srgbClr val="F4F7F9"/>
+                    </a:solidFill>
+                  </a:tcPr>
+                </a:tc>
+                <a:tc>
+                  <a:txBody>
+                    <a:bodyPr/>
+                    <a:lstStyle/>
+                    <a:p>
+                      <a:pPr algn="r"/>
+                      <a:r>
+                        <a:rPr sz="850" b="0">
+                          <a:solidFill>
+                            <a:srgbClr val="1A1A1A"/>
+                          </a:solidFill>
+                          <a:latin typeface="Versos"/>
+                        </a:rPr>
+                        <a:t>4,4%</a:t>
+                      </a:r>
+                    </a:p>
+                  </a:txBody>
+                  <a:tcPr marL="43200" marR="43200" marT="0" marB="0">
+                    <a:solidFill>
+                      <a:srgbClr val="F4F7F9"/>
+                    </a:solidFill>
+                  </a:tcPr>
+                </a:tc>
+              </a:tr>
+              <a:tr h="187200">
+                <a:tc>
+                  <a:txBody>
+                    <a:bodyPr/>
+                    <a:lstStyle/>
+                    <a:p>
+                      <a:pPr algn="l"/>
+                      <a:r>
+                        <a:rPr sz="850" b="1">
+                          <a:solidFill>
+                            <a:srgbClr val="1A1A1A"/>
+                          </a:solidFill>
+                          <a:latin typeface="Versos"/>
+                        </a:rPr>
+                        <a:t>TI e Telecomunicações</a:t>
+                      </a:r>
+                    </a:p>
+                  </a:txBody>
+                  <a:tcPr marL="43200" marR="43200" marT="0" marB="0">
+                    <a:solidFill>
+                      <a:srgbClr val="FFFFFF"/>
+                    </a:solidFill>
+                  </a:tcPr>
+                </a:tc>
+                <a:tc>
+                  <a:txBody>
+                    <a:bodyPr/>
+                    <a:lstStyle/>
+                    <a:p>
+                      <a:pPr algn="r"/>
+                      <a:r>
+                        <a:rPr sz="850" b="0">
+                          <a:solidFill>
+                            <a:srgbClr val="1A1A1A"/>
+                          </a:solidFill>
+                          <a:latin typeface="Versos"/>
+                        </a:rPr>
+                        <a:t>4,3%</a:t>
+                      </a:r>
+                    </a:p>
+                  </a:txBody>
+                  <a:tcPr marL="43200" marR="43200" marT="0" marB="0">
+                    <a:solidFill>
+                      <a:srgbClr val="FFFFFF"/>
+                    </a:solidFill>
+                  </a:tcPr>
+                </a:tc>
+              </a:tr>
+              <a:tr h="187200">
+                <a:tc>
+                  <a:txBody>
+                    <a:bodyPr/>
+                    <a:lstStyle/>
+                    <a:p>
+                      <a:pPr algn="l"/>
+                      <a:r>
+                        <a:rPr sz="850" b="1">
+                          <a:solidFill>
+                            <a:srgbClr val="1A1A1A"/>
+                          </a:solidFill>
+                          <a:latin typeface="Versos"/>
+                        </a:rPr>
+                        <a:t>Consignados</a:t>
+                      </a:r>
+                    </a:p>
+                  </a:txBody>
+                  <a:tcPr marL="43200" marR="43200" marT="0" marB="0">
+                    <a:solidFill>
+                      <a:srgbClr val="F4F7F9"/>
+                    </a:solidFill>
+                  </a:tcPr>
+                </a:tc>
+                <a:tc>
+                  <a:txBody>
+                    <a:bodyPr/>
+                    <a:lstStyle/>
+                    <a:p>
+                      <a:pPr algn="r"/>
+                      <a:r>
+                        <a:rPr sz="850" b="0">
+                          <a:solidFill>
+                            <a:srgbClr val="1A1A1A"/>
+                          </a:solidFill>
+                          <a:latin typeface="Versos"/>
+                        </a:rPr>
+                        <a:t>3,9%</a:t>
+                      </a:r>
+                    </a:p>
+                  </a:txBody>
+                  <a:tcPr marL="43200" marR="43200" marT="0" marB="0">
+                    <a:solidFill>
+                      <a:srgbClr val="F4F7F9"/>
+                    </a:solidFill>
+                  </a:tcPr>
+                </a:tc>
+              </a:tr>
+              <a:tr h="187200">
+                <a:tc>
+                  <a:txBody>
+                    <a:bodyPr/>
+                    <a:lstStyle/>
+                    <a:p>
+                      <a:pPr algn="l"/>
+                      <a:r>
+                        <a:rPr sz="850" b="1">
+                          <a:solidFill>
+                            <a:srgbClr val="1A1A1A"/>
+                          </a:solidFill>
+                          <a:latin typeface="Versos"/>
+                        </a:rPr>
+                        <a:t>Energia Elétrica</a:t>
+                      </a:r>
+                    </a:p>
+                  </a:txBody>
+                  <a:tcPr marL="43200" marR="43200" marT="0" marB="0">
+                    <a:solidFill>
+                      <a:srgbClr val="FFFFFF"/>
+                    </a:solidFill>
+                  </a:tcPr>
+                </a:tc>
+                <a:tc>
+                  <a:txBody>
+                    <a:bodyPr/>
+                    <a:lstStyle/>
+                    <a:p>
+                      <a:pPr algn="r"/>
+                      <a:r>
+                        <a:rPr sz="850" b="0">
+                          <a:solidFill>
+                            <a:srgbClr val="1A1A1A"/>
+                          </a:solidFill>
+                          <a:latin typeface="Versos"/>
+                        </a:rPr>
+                        <a:t>2,3%</a:t>
+                      </a:r>
+                    </a:p>
+                  </a:txBody>
+                  <a:tcPr marL="43200" marR="43200" marT="0" marB="0">
+                    <a:solidFill>
+                      <a:srgbClr val="FFFFFF"/>
+                    </a:solidFill>
+                  </a:tcPr>
+                </a:tc>
+              </a:tr>
+              <a:tr h="187200">
+                <a:tc>
+                  <a:txBody>
+                    <a:bodyPr/>
+                    <a:lstStyle/>
+                    <a:p>
+                      <a:pPr algn="l"/>
+                      <a:r>
+                        <a:rPr sz="850" b="1">
+                          <a:solidFill>
+                            <a:srgbClr val="1A1A1A"/>
+                          </a:solidFill>
+                          <a:latin typeface="Versos"/>
+                        </a:rPr>
+                        <a:t>Saneamento</a:t>
+                      </a:r>
+                    </a:p>
+                  </a:txBody>
+                  <a:tcPr marL="43200" marR="43200" marT="0" marB="0">
+                    <a:solidFill>
+                      <a:srgbClr val="F4F7F9"/>
+                    </a:solidFill>
+                  </a:tcPr>
+                </a:tc>
+                <a:tc>
+                  <a:txBody>
+                    <a:bodyPr/>
+                    <a:lstStyle/>
+                    <a:p>
+                      <a:pPr algn="r"/>
+                      <a:r>
+                        <a:rPr sz="850" b="0">
+                          <a:solidFill>
+                            <a:srgbClr val="1A1A1A"/>
+                          </a:solidFill>
+                          <a:latin typeface="Versos"/>
+                        </a:rPr>
+                        <a:t>2,2%</a:t>
+                      </a:r>
+                    </a:p>
+                  </a:txBody>
+                  <a:tcPr marL="43200" marR="43200" marT="0" marB="0">
+                    <a:solidFill>
+                      <a:srgbClr val="F4F7F9"/>
+                    </a:solidFill>
+                  </a:tcPr>
+                </a:tc>
+              </a:tr>
+              <a:tr h="187200">
+                <a:tc>
+                  <a:txBody>
+                    <a:bodyPr/>
+                    <a:lstStyle/>
+                    <a:p>
+                      <a:pPr algn="l"/>
+                      <a:r>
+                        <a:rPr sz="850" b="1">
+                          <a:solidFill>
+                            <a:srgbClr val="1A1A1A"/>
+                          </a:solidFill>
+                          <a:latin typeface="Versos"/>
+                        </a:rPr>
+                        <a:t>Alimentos e bebidas</a:t>
+                      </a:r>
+                    </a:p>
+                  </a:txBody>
+                  <a:tcPr marL="43200" marR="43200" marT="0" marB="0">
+                    <a:solidFill>
+                      <a:srgbClr val="FFFFFF"/>
+                    </a:solidFill>
+                  </a:tcPr>
+                </a:tc>
+                <a:tc>
+                  <a:txBody>
+                    <a:bodyPr/>
+                    <a:lstStyle/>
+                    <a:p>
+                      <a:pPr algn="r"/>
+                      <a:r>
+                        <a:rPr sz="850" b="0">
+                          <a:solidFill>
+                            <a:srgbClr val="1A1A1A"/>
+                          </a:solidFill>
+                          <a:latin typeface="Versos"/>
+                        </a:rPr>
+                        <a:t>1,4%</a:t>
+                      </a:r>
+                    </a:p>
+                  </a:txBody>
+                  <a:tcPr marL="43200" marR="43200" marT="0" marB="0">
+                    <a:solidFill>
+                      <a:srgbClr val="FFFFFF"/>
+                    </a:solidFill>
+                  </a:tcPr>
+                </a:tc>
+              </a:tr>
+              <a:tr h="187200">
+                <a:tc>
+                  <a:txBody>
+                    <a:bodyPr/>
+                    <a:lstStyle/>
+                    <a:p>
+                      <a:pPr algn="l"/>
+                      <a:r>
+                        <a:rPr sz="850" b="1">
+                          <a:solidFill>
+                            <a:srgbClr val="1A1A1A"/>
+                          </a:solidFill>
+                          <a:latin typeface="Versos"/>
+                        </a:rPr>
+                        <a:t>Assistência médica</a:t>
+                      </a:r>
+                    </a:p>
+                  </a:txBody>
+                  <a:tcPr marL="43200" marR="43200" marT="0" marB="0">
+                    <a:solidFill>
+                      <a:srgbClr val="F4F7F9"/>
+                    </a:solidFill>
+                  </a:tcPr>
+                </a:tc>
+                <a:tc>
+                  <a:txBody>
+                    <a:bodyPr/>
+                    <a:lstStyle/>
+                    <a:p>
+                      <a:pPr algn="r"/>
+                      <a:r>
+                        <a:rPr sz="850" b="0">
+                          <a:solidFill>
+                            <a:srgbClr val="1A1A1A"/>
+                          </a:solidFill>
+                          <a:latin typeface="Versos"/>
+                        </a:rPr>
+                        <a:t>1,4%</a:t>
+                      </a:r>
+                    </a:p>
+                  </a:txBody>
+                  <a:tcPr marL="43200" marR="43200" marT="0" marB="0">
+                    <a:solidFill>
+                      <a:srgbClr val="F4F7F9"/>
+                    </a:solidFill>
+                  </a:tcPr>
+                </a:tc>
+              </a:tr>
+              <a:tr h="187200">
+                <a:tc>
+                  <a:txBody>
+                    <a:bodyPr/>
+                    <a:lstStyle/>
+                    <a:p>
+                      <a:pPr algn="l"/>
+                      <a:r>
+                        <a:rPr sz="850" b="1">
+                          <a:solidFill>
+                            <a:srgbClr val="1A1A1A"/>
+                          </a:solidFill>
+                          <a:latin typeface="Versos"/>
+                        </a:rPr>
                         <a:t>Caixa</a:t>
                       </a:r>
                     </a:p>
                   </a:txBody>
                   <a:tcPr marL="43200" marR="43200" marT="0" marB="0">
                     <a:solidFill>
-                      <a:srgbClr val="F4F7F9"/>
+                      <a:srgbClr val="FFFFFF"/>
                     </a:solidFill>
                   </a:tcPr>
                 </a:tc>
@@ -5017,7 +5353,7 @@
                   </a:txBody>
                   <a:tcPr marL="43200" marR="43200" marT="0" marB="0">
                     <a:solidFill>
-                      <a:srgbClr val="F4F7F9"/>
+                      <a:srgbClr val="FFFFFF"/>
                     </a:solidFill>
                   </a:tcPr>
                 </a:tc>
@@ -5034,7 +5370,7 @@
         </p:nvSpPr>
         <p:spPr>
           <a:xfrm>
-            <a:off x="540000" y="6073200"/>
+            <a:off x="540000" y="7383600"/>
             <a:ext cx="6480000" cy="180000"/>
           </a:xfrm>
           <a:prstGeom prst="rect">
@@ -5070,7 +5406,7 @@
           <p:nvPr/>
         </p:nvGraphicFramePr>
         <p:xfrm>
-          <a:off x="540000" y="6271200"/>
+          <a:off x="540000" y="7581600"/>
           <a:ext cx="6480000" cy="374400"/>
         </p:xfrm>
         <a:graphic>

--- a/AutomaTivio/saida/2026-08/pptx/Tivio ALT Light - Relatório de Gestão - Agosto 2026.pptx
+++ b/AutomaTivio/saida/2026-08/pptx/Tivio ALT Light - Relatório de Gestão - Agosto 2026.pptx
@@ -6376,7 +6376,7 @@
                           </a:solidFill>
                           <a:latin typeface="Versos"/>
                         </a:rPr>
-                        <a:t>Investidores em geral</a:t>
+                        <a:t>Investidor qualificado</a:t>
                       </a:r>
                     </a:p>
                   </a:txBody>
@@ -6616,7 +6616,7 @@
                           </a:solidFill>
                           <a:latin typeface="Versos"/>
                         </a:rPr>
-                        <a:t>0,65% a.a.</a:t>
+                        <a:t>1,15% a.a.</a:t>
                       </a:r>
                     </a:p>
                   </a:txBody>
@@ -6664,7 +6664,7 @@
                           </a:solidFill>
                           <a:latin typeface="Versos"/>
                         </a:rPr>
-                        <a:t>Não há</a:t>
+                        <a:t>15% do retorno que exceder CDI+0,65%</a:t>
                       </a:r>
                     </a:p>
                   </a:txBody>
@@ -6784,6 +6784,259 @@
         <p:spPr>
           <a:xfrm>
             <a:off x="540000" y="3744000"/>
+            <a:ext cx="4320000" cy="180000"/>
+          </a:xfrm>
+          <a:prstGeom prst="rect">
+            <a:avLst/>
+          </a:prstGeom>
+          <a:noFill/>
+        </p:spPr>
+        <p:txBody>
+          <a:bodyPr wrap="square" lIns="0" rIns="0" tIns="0" bIns="0">
+            <a:spAutoFit/>
+          </a:bodyPr>
+          <a:lstStyle/>
+          <a:p>
+            <a:pPr algn="l"/>
+            <a:r>
+              <a:rPr sz="900" b="1">
+                <a:solidFill>
+                  <a:srgbClr val="759DB4"/>
+                </a:solidFill>
+                <a:latin typeface="Versos"/>
+              </a:rPr>
+              <a:t>INFORMAÇÕES OPERACIONAIS</a:t>
+            </a:r>
+          </a:p>
+        </p:txBody>
+      </p:sp>
+      <p:graphicFrame>
+        <p:nvGraphicFramePr>
+          <p:cNvPr id="9" name="Table 8"/>
+          <p:cNvGraphicFramePr>
+            <a:graphicFrameLocks noGrp="1"/>
+          </p:cNvGraphicFramePr>
+          <p:nvPr/>
+        </p:nvGraphicFramePr>
+        <p:xfrm>
+          <a:off x="540000" y="3942000"/>
+          <a:ext cx="6479999" cy="748800"/>
+        </p:xfrm>
+        <a:graphic>
+          <a:graphicData uri="http://schemas.openxmlformats.org/drawingml/2006/table">
+            <a:tbl>
+              <a:tblPr firstRow="1" bandRow="1">
+                <a:tableStyleId>{5C22544A-7EE6-4342-B048-85BDC9FD1C3A}</a:tableStyleId>
+              </a:tblPr>
+              <a:tblGrid>
+                <a:gridCol w="3751578"/>
+                <a:gridCol w="2728421"/>
+              </a:tblGrid>
+              <a:tr h="187200">
+                <a:tc>
+                  <a:txBody>
+                    <a:bodyPr/>
+                    <a:lstStyle/>
+                    <a:p>
+                      <a:pPr algn="l"/>
+                      <a:r>
+                        <a:rPr sz="850" b="1">
+                          <a:solidFill>
+                            <a:srgbClr val="1A1A1A"/>
+                          </a:solidFill>
+                          <a:latin typeface="Versos"/>
+                        </a:rPr>
+                        <a:t>Aplicação</a:t>
+                      </a:r>
+                    </a:p>
+                  </a:txBody>
+                  <a:tcPr marL="43200" marR="43200" marT="0" marB="0">
+                    <a:solidFill>
+                      <a:srgbClr val="FFFFFF"/>
+                    </a:solidFill>
+                  </a:tcPr>
+                </a:tc>
+                <a:tc>
+                  <a:txBody>
+                    <a:bodyPr/>
+                    <a:lstStyle/>
+                    <a:p>
+                      <a:pPr algn="r"/>
+                      <a:r>
+                        <a:rPr sz="850" b="0">
+                          <a:solidFill>
+                            <a:srgbClr val="1A1A1A"/>
+                          </a:solidFill>
+                          <a:latin typeface="Versos"/>
+                        </a:rPr>
+                        <a:t>D+1</a:t>
+                      </a:r>
+                    </a:p>
+                  </a:txBody>
+                  <a:tcPr marL="43200" marR="43200" marT="0" marB="0">
+                    <a:solidFill>
+                      <a:srgbClr val="FFFFFF"/>
+                    </a:solidFill>
+                  </a:tcPr>
+                </a:tc>
+              </a:tr>
+              <a:tr h="187200">
+                <a:tc>
+                  <a:txBody>
+                    <a:bodyPr/>
+                    <a:lstStyle/>
+                    <a:p>
+                      <a:pPr algn="l"/>
+                      <a:r>
+                        <a:rPr sz="850" b="1">
+                          <a:solidFill>
+                            <a:srgbClr val="1A1A1A"/>
+                          </a:solidFill>
+                          <a:latin typeface="Versos"/>
+                        </a:rPr>
+                        <a:t>Resgate</a:t>
+                      </a:r>
+                    </a:p>
+                  </a:txBody>
+                  <a:tcPr marL="43200" marR="43200" marT="0" marB="0">
+                    <a:solidFill>
+                      <a:srgbClr val="F4F7F9"/>
+                    </a:solidFill>
+                  </a:tcPr>
+                </a:tc>
+                <a:tc>
+                  <a:txBody>
+                    <a:bodyPr/>
+                    <a:lstStyle/>
+                    <a:p>
+                      <a:pPr algn="r"/>
+                      <a:r>
+                        <a:rPr sz="850" b="0">
+                          <a:solidFill>
+                            <a:srgbClr val="1A1A1A"/>
+                          </a:solidFill>
+                          <a:latin typeface="Versos"/>
+                        </a:rPr>
+                        <a:t>D+50</a:t>
+                      </a:r>
+                    </a:p>
+                  </a:txBody>
+                  <a:tcPr marL="43200" marR="43200" marT="0" marB="0">
+                    <a:solidFill>
+                      <a:srgbClr val="F4F7F9"/>
+                    </a:solidFill>
+                  </a:tcPr>
+                </a:tc>
+              </a:tr>
+              <a:tr h="187200">
+                <a:tc>
+                  <a:txBody>
+                    <a:bodyPr/>
+                    <a:lstStyle/>
+                    <a:p>
+                      <a:pPr algn="l"/>
+                      <a:r>
+                        <a:rPr sz="850" b="1">
+                          <a:solidFill>
+                            <a:srgbClr val="1A1A1A"/>
+                          </a:solidFill>
+                          <a:latin typeface="Versos"/>
+                        </a:rPr>
+                        <a:t>Aplicação mínima inicial</a:t>
+                      </a:r>
+                    </a:p>
+                  </a:txBody>
+                  <a:tcPr marL="43200" marR="43200" marT="0" marB="0">
+                    <a:solidFill>
+                      <a:srgbClr val="FFFFFF"/>
+                    </a:solidFill>
+                  </a:tcPr>
+                </a:tc>
+                <a:tc>
+                  <a:txBody>
+                    <a:bodyPr/>
+                    <a:lstStyle/>
+                    <a:p>
+                      <a:pPr algn="r"/>
+                      <a:r>
+                        <a:rPr sz="850" b="0">
+                          <a:solidFill>
+                            <a:srgbClr val="1A1A1A"/>
+                          </a:solidFill>
+                          <a:latin typeface="Versos"/>
+                        </a:rPr>
+                        <a:t>R$ 1.000,00</a:t>
+                      </a:r>
+                    </a:p>
+                  </a:txBody>
+                  <a:tcPr marL="43200" marR="43200" marT="0" marB="0">
+                    <a:solidFill>
+                      <a:srgbClr val="FFFFFF"/>
+                    </a:solidFill>
+                  </a:tcPr>
+                </a:tc>
+              </a:tr>
+              <a:tr h="187200">
+                <a:tc>
+                  <a:txBody>
+                    <a:bodyPr/>
+                    <a:lstStyle/>
+                    <a:p>
+                      <a:pPr algn="l"/>
+                      <a:r>
+                        <a:rPr sz="850" b="1">
+                          <a:solidFill>
+                            <a:srgbClr val="1A1A1A"/>
+                          </a:solidFill>
+                          <a:latin typeface="Versos"/>
+                        </a:rPr>
+                        <a:t>Movimentação mínima</a:t>
+                      </a:r>
+                    </a:p>
+                  </a:txBody>
+                  <a:tcPr marL="43200" marR="43200" marT="0" marB="0">
+                    <a:solidFill>
+                      <a:srgbClr val="F4F7F9"/>
+                    </a:solidFill>
+                  </a:tcPr>
+                </a:tc>
+                <a:tc>
+                  <a:txBody>
+                    <a:bodyPr/>
+                    <a:lstStyle/>
+                    <a:p>
+                      <a:pPr algn="r"/>
+                      <a:r>
+                        <a:rPr sz="850" b="0">
+                          <a:solidFill>
+                            <a:srgbClr val="1A1A1A"/>
+                          </a:solidFill>
+                          <a:latin typeface="Versos"/>
+                        </a:rPr>
+                        <a:t>R$ 1.000,00</a:t>
+                      </a:r>
+                    </a:p>
+                  </a:txBody>
+                  <a:tcPr marL="43200" marR="43200" marT="0" marB="0">
+                    <a:solidFill>
+                      <a:srgbClr val="F4F7F9"/>
+                    </a:solidFill>
+                  </a:tcPr>
+                </a:tc>
+              </a:tr>
+            </a:tbl>
+          </a:graphicData>
+        </a:graphic>
+      </p:graphicFrame>
+      <p:sp>
+        <p:nvSpPr>
+          <p:cNvPr id="10" name="TextBox 9"/>
+          <p:cNvSpPr txBox="1"/>
+          <p:nvPr/>
+        </p:nvSpPr>
+        <p:spPr>
+          <a:xfrm>
+            <a:off x="540000" y="4978800"/>
             <a:ext cx="6480000" cy="180000"/>
           </a:xfrm>
           <a:prstGeom prst="rect">
@@ -6812,14 +7065,14 @@
       </p:sp>
       <p:sp>
         <p:nvSpPr>
-          <p:cNvPr id="9" name="TextBox 8"/>
+          <p:cNvPr id="11" name="TextBox 10"/>
           <p:cNvSpPr txBox="1"/>
           <p:nvPr/>
         </p:nvSpPr>
         <p:spPr>
           <a:xfrm>
-            <a:off x="540000" y="3942000"/>
-            <a:ext cx="6480000" cy="6156000"/>
+            <a:off x="540000" y="5176800"/>
+            <a:ext cx="6480000" cy="4921200"/>
           </a:xfrm>
           <a:prstGeom prst="rect">
             <a:avLst/>
@@ -6919,7 +7172,7 @@
       </p:sp>
       <p:sp>
         <p:nvSpPr>
-          <p:cNvPr id="10" name="TextBox 9"/>
+          <p:cNvPr id="12" name="TextBox 11"/>
           <p:cNvSpPr txBox="1"/>
           <p:nvPr/>
         </p:nvSpPr>
@@ -6954,7 +7207,7 @@
       </p:sp>
       <p:sp>
         <p:nvSpPr>
-          <p:cNvPr id="11" name="TextBox 10"/>
+          <p:cNvPr id="13" name="TextBox 12"/>
           <p:cNvSpPr txBox="1"/>
           <p:nvPr/>
         </p:nvSpPr>

--- a/AutomaTivio/saida/2026-08/pptx/Tivio ALT Light - Relatório de Gestão - Agosto 2026.pptx
+++ b/AutomaTivio/saida/2026-08/pptx/Tivio ALT Light - Relatório de Gestão - Agosto 2026.pptx
@@ -3146,7 +3146,7 @@
                 </a:solidFill>
                 <a:latin typeface="Versos"/>
               </a:rPr>
-              <a:t>TIVIO ALT LIGHT XP SEG PREV FC MULT CP RL </a:t>
+              <a:t>TIVIO ALT LIGHT XP PREV </a:t>
             </a:r>
             <a:r>
               <a:rPr sz="833" b="0" i="0">
@@ -4640,7 +4640,7 @@
             <a:r>
               <a:rPr sz="1012" b="0" i="0">
                 <a:solidFill>
-                  <a:srgbClr val="FFFFFF"/>
+                  <a:srgbClr val="2B3744"/>
                 </a:solidFill>
                 <a:latin typeface="Versos"/>
               </a:rPr>
@@ -4677,7 +4677,7 @@
             <a:r>
               <a:rPr sz="1250" b="1" i="0">
                 <a:solidFill>
-                  <a:srgbClr val="FFFFFF"/>
+                  <a:srgbClr val="2B3744"/>
                 </a:solidFill>
                 <a:latin typeface="Versos"/>
               </a:rPr>
@@ -4714,7 +4714,7 @@
             <a:r>
               <a:rPr sz="1012" b="0" i="0">
                 <a:solidFill>
-                  <a:srgbClr val="2B3744"/>
+                  <a:srgbClr val="FFFFFF"/>
                 </a:solidFill>
                 <a:latin typeface="Versos"/>
               </a:rPr>
@@ -4730,7 +4730,7 @@
             <a:r>
               <a:rPr sz="1012" b="1" i="0">
                 <a:solidFill>
-                  <a:srgbClr val="2B3744"/>
+                  <a:srgbClr val="FFFFFF"/>
                 </a:solidFill>
                 <a:latin typeface="Versos"/>
               </a:rPr>
@@ -4767,7 +4767,7 @@
             <a:r>
               <a:rPr sz="1250" b="1" i="0">
                 <a:solidFill>
-                  <a:srgbClr val="2B3744"/>
+                  <a:srgbClr val="FFFFFF"/>
                 </a:solidFill>
                 <a:latin typeface="Versos"/>
               </a:rPr>
@@ -4804,7 +4804,7 @@
             <a:r>
               <a:rPr sz="1012" b="0" i="0">
                 <a:solidFill>
-                  <a:srgbClr val="FFFFFF"/>
+                  <a:srgbClr val="2B3744"/>
                 </a:solidFill>
                 <a:latin typeface="Versos"/>
               </a:rPr>
@@ -4820,7 +4820,7 @@
             <a:r>
               <a:rPr sz="1012" b="1" i="0">
                 <a:solidFill>
-                  <a:srgbClr val="FFFFFF"/>
+                  <a:srgbClr val="2B3744"/>
                 </a:solidFill>
                 <a:latin typeface="Versos"/>
               </a:rPr>
@@ -4857,7 +4857,7 @@
             <a:r>
               <a:rPr sz="1250" b="1" i="0">
                 <a:solidFill>
-                  <a:srgbClr val="FFFFFF"/>
+                  <a:srgbClr val="2B3744"/>
                 </a:solidFill>
                 <a:latin typeface="Versos"/>
               </a:rPr>
@@ -4968,7 +4968,7 @@
             <a:r>
               <a:rPr sz="690" b="1" i="0">
                 <a:solidFill>
-                  <a:srgbClr val="2B3744"/>
+                  <a:srgbClr val="FFFFFF"/>
                 </a:solidFill>
                 <a:latin typeface="Versos"/>
               </a:rPr>
@@ -5478,8 +5478,8 @@
         </p:nvSpPr>
         <p:spPr>
           <a:xfrm>
-            <a:off x="400680" y="1630715"/>
-            <a:ext cx="1541030" cy="120960"/>
+            <a:off x="400680" y="1600948"/>
+            <a:ext cx="1541030" cy="113400"/>
           </a:xfrm>
           <a:prstGeom prst="rect">
             <a:avLst/>
@@ -5492,68 +5492,142 @@
           <a:p>
             <a:pPr algn="r">
               <a:lnSpc>
-                <a:spcPts val="890"/>
+                <a:spcPts val="825"/>
+              </a:lnSpc>
+            </a:pPr>
+            <a:r>
+              <a:rPr sz="750" b="0" i="0">
+                <a:solidFill>
+                  <a:srgbClr val="222222"/>
+                </a:solidFill>
+                <a:latin typeface="Versos"/>
+              </a:rPr>
+              <a:t>Financeiro</a:t>
+            </a:r>
+          </a:p>
+        </p:txBody>
+      </p:sp>
+      <p:sp>
+        <p:nvSpPr>
+          <p:cNvPr id="6" name="TextBox 5"/>
+          <p:cNvSpPr txBox="1"/>
+          <p:nvPr/>
+        </p:nvSpPr>
+        <p:spPr>
+          <a:xfrm>
+            <a:off x="3217488" y="1600357"/>
+            <a:ext cx="408721" cy="120960"/>
+          </a:xfrm>
+          <a:prstGeom prst="rect">
+            <a:avLst/>
+          </a:prstGeom>
+          <a:noFill/>
+        </p:spPr>
+        <p:txBody>
+          <a:bodyPr wrap="none" lIns="0" rIns="0" tIns="0" bIns="0" anchor="t"/>
+          <a:lstStyle/>
+          <a:p>
+            <a:pPr algn="l">
+              <a:lnSpc>
+                <a:spcPts val="971"/>
               </a:lnSpc>
             </a:pPr>
             <a:r>
               <a:rPr sz="809" b="0" i="0">
                 <a:solidFill>
+                  <a:srgbClr val="4F7A93"/>
+                </a:solidFill>
+                <a:latin typeface="Versos"/>
+              </a:rPr>
+              <a:t>40,68%</a:t>
+            </a:r>
+          </a:p>
+        </p:txBody>
+      </p:sp>
+      <p:sp>
+        <p:nvSpPr>
+          <p:cNvPr id="7" name="TextBox 6"/>
+          <p:cNvSpPr txBox="1"/>
+          <p:nvPr/>
+        </p:nvSpPr>
+        <p:spPr>
+          <a:xfrm>
+            <a:off x="400680" y="1789948"/>
+            <a:ext cx="1541030" cy="113400"/>
+          </a:xfrm>
+          <a:prstGeom prst="rect">
+            <a:avLst/>
+          </a:prstGeom>
+          <a:noFill/>
+        </p:spPr>
+        <p:txBody>
+          <a:bodyPr wrap="none" lIns="0" rIns="0" tIns="0" bIns="0" anchor="t"/>
+          <a:lstStyle/>
+          <a:p>
+            <a:pPr algn="r">
+              <a:lnSpc>
+                <a:spcPts val="825"/>
+              </a:lnSpc>
+            </a:pPr>
+            <a:r>
+              <a:rPr sz="750" b="0" i="0">
+                <a:solidFill>
                   <a:srgbClr val="222222"/>
                 </a:solidFill>
                 <a:latin typeface="Versos"/>
               </a:rPr>
-              <a:t>Financeiro</a:t>
-            </a:r>
-          </a:p>
-        </p:txBody>
-      </p:sp>
-      <p:sp>
-        <p:nvSpPr>
-          <p:cNvPr id="6" name="TextBox 5"/>
-          <p:cNvSpPr txBox="1"/>
-          <p:nvPr/>
-        </p:nvSpPr>
-        <p:spPr>
-          <a:xfrm>
-            <a:off x="3217488" y="1623037"/>
-            <a:ext cx="471744" cy="143640"/>
-          </a:xfrm>
-          <a:prstGeom prst="rect">
-            <a:avLst/>
-          </a:prstGeom>
-          <a:noFill/>
-        </p:spPr>
-        <p:txBody>
-          <a:bodyPr wrap="none" lIns="0" rIns="0" tIns="0" bIns="0" anchor="t"/>
-          <a:lstStyle/>
-          <a:p>
-            <a:pPr algn="l">
-              <a:lnSpc>
-                <a:spcPts val="1107"/>
-              </a:lnSpc>
-            </a:pPr>
-            <a:r>
-              <a:rPr sz="922" b="1" i="0">
-                <a:solidFill>
-                  <a:srgbClr val="111111"/>
-                </a:solidFill>
-                <a:latin typeface="Versos"/>
-              </a:rPr>
-              <a:t>40,68%</a:t>
-            </a:r>
-          </a:p>
-        </p:txBody>
-      </p:sp>
-      <p:sp>
-        <p:nvSpPr>
-          <p:cNvPr id="7" name="TextBox 6"/>
-          <p:cNvSpPr txBox="1"/>
-          <p:nvPr/>
-        </p:nvSpPr>
-        <p:spPr>
-          <a:xfrm>
-            <a:off x="400680" y="1887755"/>
-            <a:ext cx="1541030" cy="120960"/>
+              <a:t>Indústria e Comércio</a:t>
+            </a:r>
+          </a:p>
+        </p:txBody>
+      </p:sp>
+      <p:sp>
+        <p:nvSpPr>
+          <p:cNvPr id="8" name="TextBox 7"/>
+          <p:cNvSpPr txBox="1"/>
+          <p:nvPr/>
+        </p:nvSpPr>
+        <p:spPr>
+          <a:xfrm>
+            <a:off x="2443770" y="1789357"/>
+            <a:ext cx="375921" cy="120960"/>
+          </a:xfrm>
+          <a:prstGeom prst="rect">
+            <a:avLst/>
+          </a:prstGeom>
+          <a:noFill/>
+        </p:spPr>
+        <p:txBody>
+          <a:bodyPr wrap="none" lIns="0" rIns="0" tIns="0" bIns="0" anchor="t"/>
+          <a:lstStyle/>
+          <a:p>
+            <a:pPr algn="l">
+              <a:lnSpc>
+                <a:spcPts val="971"/>
+              </a:lnSpc>
+            </a:pPr>
+            <a:r>
+              <a:rPr sz="809" b="0" i="0">
+                <a:solidFill>
+                  <a:srgbClr val="4F7A93"/>
+                </a:solidFill>
+                <a:latin typeface="Versos"/>
+              </a:rPr>
+              <a:t>14,26%</a:t>
+            </a:r>
+          </a:p>
+        </p:txBody>
+      </p:sp>
+      <p:sp>
+        <p:nvSpPr>
+          <p:cNvPr id="9" name="TextBox 8"/>
+          <p:cNvSpPr txBox="1"/>
+          <p:nvPr/>
+        </p:nvSpPr>
+        <p:spPr>
+          <a:xfrm>
+            <a:off x="400680" y="1978948"/>
+            <a:ext cx="1541030" cy="113400"/>
           </a:xfrm>
           <a:prstGeom prst="rect">
             <a:avLst/>
@@ -5566,68 +5640,142 @@
           <a:p>
             <a:pPr algn="r">
               <a:lnSpc>
-                <a:spcPts val="890"/>
+                <a:spcPts val="825"/>
+              </a:lnSpc>
+            </a:pPr>
+            <a:r>
+              <a:rPr sz="750" b="0" i="0">
+                <a:solidFill>
+                  <a:srgbClr val="222222"/>
+                </a:solidFill>
+                <a:latin typeface="Versos"/>
+              </a:rPr>
+              <a:t>Caixa</a:t>
+            </a:r>
+          </a:p>
+        </p:txBody>
+      </p:sp>
+      <p:sp>
+        <p:nvSpPr>
+          <p:cNvPr id="10" name="TextBox 9"/>
+          <p:cNvSpPr txBox="1"/>
+          <p:nvPr/>
+        </p:nvSpPr>
+        <p:spPr>
+          <a:xfrm>
+            <a:off x="2253116" y="1978357"/>
+            <a:ext cx="305282" cy="120960"/>
+          </a:xfrm>
+          <a:prstGeom prst="rect">
+            <a:avLst/>
+          </a:prstGeom>
+          <a:noFill/>
+        </p:spPr>
+        <p:txBody>
+          <a:bodyPr wrap="none" lIns="0" rIns="0" tIns="0" bIns="0" anchor="t"/>
+          <a:lstStyle/>
+          <a:p>
+            <a:pPr algn="l">
+              <a:lnSpc>
+                <a:spcPts val="971"/>
               </a:lnSpc>
             </a:pPr>
             <a:r>
               <a:rPr sz="809" b="0" i="0">
                 <a:solidFill>
+                  <a:srgbClr val="4F7A93"/>
+                </a:solidFill>
+                <a:latin typeface="Versos"/>
+              </a:rPr>
+              <a:t>7,75%</a:t>
+            </a:r>
+          </a:p>
+        </p:txBody>
+      </p:sp>
+      <p:sp>
+        <p:nvSpPr>
+          <p:cNvPr id="11" name="TextBox 10"/>
+          <p:cNvSpPr txBox="1"/>
+          <p:nvPr/>
+        </p:nvSpPr>
+        <p:spPr>
+          <a:xfrm>
+            <a:off x="400680" y="2167948"/>
+            <a:ext cx="1541030" cy="113400"/>
+          </a:xfrm>
+          <a:prstGeom prst="rect">
+            <a:avLst/>
+          </a:prstGeom>
+          <a:noFill/>
+        </p:spPr>
+        <p:txBody>
+          <a:bodyPr wrap="none" lIns="0" rIns="0" tIns="0" bIns="0" anchor="t"/>
+          <a:lstStyle/>
+          <a:p>
+            <a:pPr algn="r">
+              <a:lnSpc>
+                <a:spcPts val="825"/>
+              </a:lnSpc>
+            </a:pPr>
+            <a:r>
+              <a:rPr sz="750" b="0" i="0">
+                <a:solidFill>
                   <a:srgbClr val="222222"/>
                 </a:solidFill>
                 <a:latin typeface="Versos"/>
               </a:rPr>
-              <a:t>Indústria e Comércio</a:t>
-            </a:r>
-          </a:p>
-        </p:txBody>
-      </p:sp>
-      <p:sp>
-        <p:nvSpPr>
-          <p:cNvPr id="8" name="TextBox 7"/>
-          <p:cNvSpPr txBox="1"/>
-          <p:nvPr/>
-        </p:nvSpPr>
-        <p:spPr>
-          <a:xfrm>
-            <a:off x="2443770" y="1880077"/>
-            <a:ext cx="435257" cy="143640"/>
-          </a:xfrm>
-          <a:prstGeom prst="rect">
-            <a:avLst/>
-          </a:prstGeom>
-          <a:noFill/>
-        </p:spPr>
-        <p:txBody>
-          <a:bodyPr wrap="none" lIns="0" rIns="0" tIns="0" bIns="0" anchor="t"/>
-          <a:lstStyle/>
-          <a:p>
-            <a:pPr algn="l">
-              <a:lnSpc>
-                <a:spcPts val="1107"/>
-              </a:lnSpc>
-            </a:pPr>
-            <a:r>
-              <a:rPr sz="922" b="1" i="0">
-                <a:solidFill>
-                  <a:srgbClr val="111111"/>
-                </a:solidFill>
-                <a:latin typeface="Versos"/>
-              </a:rPr>
-              <a:t>14,26%</a:t>
-            </a:r>
-          </a:p>
-        </p:txBody>
-      </p:sp>
-      <p:sp>
-        <p:nvSpPr>
-          <p:cNvPr id="9" name="TextBox 8"/>
-          <p:cNvSpPr txBox="1"/>
-          <p:nvPr/>
-        </p:nvSpPr>
-        <p:spPr>
-          <a:xfrm>
-            <a:off x="400680" y="2144795"/>
-            <a:ext cx="1541030" cy="120960"/>
+              <a:t>Locação de veículos</a:t>
+            </a:r>
+          </a:p>
+        </p:txBody>
+      </p:sp>
+      <p:sp>
+        <p:nvSpPr>
+          <p:cNvPr id="12" name="TextBox 11"/>
+          <p:cNvSpPr txBox="1"/>
+          <p:nvPr/>
+        </p:nvSpPr>
+        <p:spPr>
+          <a:xfrm>
+            <a:off x="2183186" y="2167357"/>
+            <a:ext cx="325921" cy="120960"/>
+          </a:xfrm>
+          <a:prstGeom prst="rect">
+            <a:avLst/>
+          </a:prstGeom>
+          <a:noFill/>
+        </p:spPr>
+        <p:txBody>
+          <a:bodyPr wrap="none" lIns="0" rIns="0" tIns="0" bIns="0" anchor="t"/>
+          <a:lstStyle/>
+          <a:p>
+            <a:pPr algn="l">
+              <a:lnSpc>
+                <a:spcPts val="971"/>
+              </a:lnSpc>
+            </a:pPr>
+            <a:r>
+              <a:rPr sz="809" b="0" i="0">
+                <a:solidFill>
+                  <a:srgbClr val="4F7A93"/>
+                </a:solidFill>
+                <a:latin typeface="Versos"/>
+              </a:rPr>
+              <a:t>5,37%</a:t>
+            </a:r>
+          </a:p>
+        </p:txBody>
+      </p:sp>
+      <p:sp>
+        <p:nvSpPr>
+          <p:cNvPr id="13" name="TextBox 12"/>
+          <p:cNvSpPr txBox="1"/>
+          <p:nvPr/>
+        </p:nvSpPr>
+        <p:spPr>
+          <a:xfrm>
+            <a:off x="400680" y="2356948"/>
+            <a:ext cx="1541030" cy="113400"/>
           </a:xfrm>
           <a:prstGeom prst="rect">
             <a:avLst/>
@@ -5640,68 +5788,142 @@
           <a:p>
             <a:pPr algn="r">
               <a:lnSpc>
-                <a:spcPts val="890"/>
+                <a:spcPts val="825"/>
+              </a:lnSpc>
+            </a:pPr>
+            <a:r>
+              <a:rPr sz="750" b="0" i="0">
+                <a:solidFill>
+                  <a:srgbClr val="222222"/>
+                </a:solidFill>
+                <a:latin typeface="Versos"/>
+              </a:rPr>
+              <a:t>Transporte e Logística</a:t>
+            </a:r>
+          </a:p>
+        </p:txBody>
+      </p:sp>
+      <p:sp>
+        <p:nvSpPr>
+          <p:cNvPr id="14" name="TextBox 13"/>
+          <p:cNvSpPr txBox="1"/>
+          <p:nvPr/>
+        </p:nvSpPr>
+        <p:spPr>
+          <a:xfrm>
+            <a:off x="2170428" y="2356357"/>
+            <a:ext cx="337346" cy="120960"/>
+          </a:xfrm>
+          <a:prstGeom prst="rect">
+            <a:avLst/>
+          </a:prstGeom>
+          <a:noFill/>
+        </p:spPr>
+        <p:txBody>
+          <a:bodyPr wrap="none" lIns="0" rIns="0" tIns="0" bIns="0" anchor="t"/>
+          <a:lstStyle/>
+          <a:p>
+            <a:pPr algn="l">
+              <a:lnSpc>
+                <a:spcPts val="971"/>
               </a:lnSpc>
             </a:pPr>
             <a:r>
               <a:rPr sz="809" b="0" i="0">
                 <a:solidFill>
+                  <a:srgbClr val="4F7A93"/>
+                </a:solidFill>
+                <a:latin typeface="Versos"/>
+              </a:rPr>
+              <a:t>4,93%</a:t>
+            </a:r>
+          </a:p>
+        </p:txBody>
+      </p:sp>
+      <p:sp>
+        <p:nvSpPr>
+          <p:cNvPr id="15" name="TextBox 14"/>
+          <p:cNvSpPr txBox="1"/>
+          <p:nvPr/>
+        </p:nvSpPr>
+        <p:spPr>
+          <a:xfrm>
+            <a:off x="400680" y="2545948"/>
+            <a:ext cx="1541030" cy="113400"/>
+          </a:xfrm>
+          <a:prstGeom prst="rect">
+            <a:avLst/>
+          </a:prstGeom>
+          <a:noFill/>
+        </p:spPr>
+        <p:txBody>
+          <a:bodyPr wrap="none" lIns="0" rIns="0" tIns="0" bIns="0" anchor="t"/>
+          <a:lstStyle/>
+          <a:p>
+            <a:pPr algn="r">
+              <a:lnSpc>
+                <a:spcPts val="825"/>
+              </a:lnSpc>
+            </a:pPr>
+            <a:r>
+              <a:rPr sz="750" b="0" i="0">
+                <a:solidFill>
                   <a:srgbClr val="222222"/>
                 </a:solidFill>
                 <a:latin typeface="Versos"/>
               </a:rPr>
-              <a:t>Caixa</a:t>
-            </a:r>
-          </a:p>
-        </p:txBody>
-      </p:sp>
-      <p:sp>
-        <p:nvSpPr>
-          <p:cNvPr id="10" name="TextBox 9"/>
-          <p:cNvSpPr txBox="1"/>
-          <p:nvPr/>
-        </p:nvSpPr>
-        <p:spPr>
-          <a:xfrm>
-            <a:off x="2253116" y="2137117"/>
-            <a:ext cx="352579" cy="143640"/>
-          </a:xfrm>
-          <a:prstGeom prst="rect">
-            <a:avLst/>
-          </a:prstGeom>
-          <a:noFill/>
-        </p:spPr>
-        <p:txBody>
-          <a:bodyPr wrap="none" lIns="0" rIns="0" tIns="0" bIns="0" anchor="t"/>
-          <a:lstStyle/>
-          <a:p>
-            <a:pPr algn="l">
-              <a:lnSpc>
-                <a:spcPts val="1107"/>
-              </a:lnSpc>
-            </a:pPr>
-            <a:r>
-              <a:rPr sz="922" b="1" i="0">
-                <a:solidFill>
-                  <a:srgbClr val="111111"/>
-                </a:solidFill>
-                <a:latin typeface="Versos"/>
-              </a:rPr>
-              <a:t>7,75%</a:t>
-            </a:r>
-          </a:p>
-        </p:txBody>
-      </p:sp>
-      <p:sp>
-        <p:nvSpPr>
-          <p:cNvPr id="11" name="TextBox 10"/>
-          <p:cNvSpPr txBox="1"/>
-          <p:nvPr/>
-        </p:nvSpPr>
-        <p:spPr>
-          <a:xfrm>
-            <a:off x="400680" y="2401835"/>
-            <a:ext cx="1541030" cy="120960"/>
+              <a:t>Comércio atacadista e varejista</a:t>
+            </a:r>
+          </a:p>
+        </p:txBody>
+      </p:sp>
+      <p:sp>
+        <p:nvSpPr>
+          <p:cNvPr id="16" name="TextBox 15"/>
+          <p:cNvSpPr txBox="1"/>
+          <p:nvPr/>
+        </p:nvSpPr>
+        <p:spPr>
+          <a:xfrm>
+            <a:off x="2158616" y="2545357"/>
+            <a:ext cx="335011" cy="120960"/>
+          </a:xfrm>
+          <a:prstGeom prst="rect">
+            <a:avLst/>
+          </a:prstGeom>
+          <a:noFill/>
+        </p:spPr>
+        <p:txBody>
+          <a:bodyPr wrap="none" lIns="0" rIns="0" tIns="0" bIns="0" anchor="t"/>
+          <a:lstStyle/>
+          <a:p>
+            <a:pPr algn="l">
+              <a:lnSpc>
+                <a:spcPts val="971"/>
+              </a:lnSpc>
+            </a:pPr>
+            <a:r>
+              <a:rPr sz="809" b="0" i="0">
+                <a:solidFill>
+                  <a:srgbClr val="4F7A93"/>
+                </a:solidFill>
+                <a:latin typeface="Versos"/>
+              </a:rPr>
+              <a:t>4,52%</a:t>
+            </a:r>
+          </a:p>
+        </p:txBody>
+      </p:sp>
+      <p:sp>
+        <p:nvSpPr>
+          <p:cNvPr id="17" name="TextBox 16"/>
+          <p:cNvSpPr txBox="1"/>
+          <p:nvPr/>
+        </p:nvSpPr>
+        <p:spPr>
+          <a:xfrm>
+            <a:off x="400680" y="2734948"/>
+            <a:ext cx="1541030" cy="113400"/>
           </a:xfrm>
           <a:prstGeom prst="rect">
             <a:avLst/>
@@ -5714,68 +5936,142 @@
           <a:p>
             <a:pPr algn="r">
               <a:lnSpc>
-                <a:spcPts val="890"/>
+                <a:spcPts val="825"/>
+              </a:lnSpc>
+            </a:pPr>
+            <a:r>
+              <a:rPr sz="750" b="0" i="0">
+                <a:solidFill>
+                  <a:srgbClr val="222222"/>
+                </a:solidFill>
+                <a:latin typeface="Versos"/>
+              </a:rPr>
+              <a:t>Crédito PF</a:t>
+            </a:r>
+          </a:p>
+        </p:txBody>
+      </p:sp>
+      <p:sp>
+        <p:nvSpPr>
+          <p:cNvPr id="18" name="TextBox 17"/>
+          <p:cNvSpPr txBox="1"/>
+          <p:nvPr/>
+        </p:nvSpPr>
+        <p:spPr>
+          <a:xfrm>
+            <a:off x="2155781" y="2734357"/>
+            <a:ext cx="339803" cy="120960"/>
+          </a:xfrm>
+          <a:prstGeom prst="rect">
+            <a:avLst/>
+          </a:prstGeom>
+          <a:noFill/>
+        </p:spPr>
+        <p:txBody>
+          <a:bodyPr wrap="none" lIns="0" rIns="0" tIns="0" bIns="0" anchor="t"/>
+          <a:lstStyle/>
+          <a:p>
+            <a:pPr algn="l">
+              <a:lnSpc>
+                <a:spcPts val="971"/>
               </a:lnSpc>
             </a:pPr>
             <a:r>
               <a:rPr sz="809" b="0" i="0">
                 <a:solidFill>
+                  <a:srgbClr val="4F7A93"/>
+                </a:solidFill>
+                <a:latin typeface="Versos"/>
+              </a:rPr>
+              <a:t>4,43%</a:t>
+            </a:r>
+          </a:p>
+        </p:txBody>
+      </p:sp>
+      <p:sp>
+        <p:nvSpPr>
+          <p:cNvPr id="19" name="TextBox 18"/>
+          <p:cNvSpPr txBox="1"/>
+          <p:nvPr/>
+        </p:nvSpPr>
+        <p:spPr>
+          <a:xfrm>
+            <a:off x="400680" y="2923948"/>
+            <a:ext cx="1541030" cy="113400"/>
+          </a:xfrm>
+          <a:prstGeom prst="rect">
+            <a:avLst/>
+          </a:prstGeom>
+          <a:noFill/>
+        </p:spPr>
+        <p:txBody>
+          <a:bodyPr wrap="none" lIns="0" rIns="0" tIns="0" bIns="0" anchor="t"/>
+          <a:lstStyle/>
+          <a:p>
+            <a:pPr algn="r">
+              <a:lnSpc>
+                <a:spcPts val="825"/>
+              </a:lnSpc>
+            </a:pPr>
+            <a:r>
+              <a:rPr sz="750" b="0" i="0">
+                <a:solidFill>
                   <a:srgbClr val="222222"/>
                 </a:solidFill>
                 <a:latin typeface="Versos"/>
               </a:rPr>
-              <a:t>Locação de veículos</a:t>
-            </a:r>
-          </a:p>
-        </p:txBody>
-      </p:sp>
-      <p:sp>
-        <p:nvSpPr>
-          <p:cNvPr id="12" name="TextBox 11"/>
-          <p:cNvSpPr txBox="1"/>
-          <p:nvPr/>
-        </p:nvSpPr>
-        <p:spPr>
-          <a:xfrm>
-            <a:off x="2183186" y="2394157"/>
-            <a:ext cx="376903" cy="143640"/>
-          </a:xfrm>
-          <a:prstGeom prst="rect">
-            <a:avLst/>
-          </a:prstGeom>
-          <a:noFill/>
-        </p:spPr>
-        <p:txBody>
-          <a:bodyPr wrap="none" lIns="0" rIns="0" tIns="0" bIns="0" anchor="t"/>
-          <a:lstStyle/>
-          <a:p>
-            <a:pPr algn="l">
-              <a:lnSpc>
-                <a:spcPts val="1107"/>
-              </a:lnSpc>
-            </a:pPr>
-            <a:r>
-              <a:rPr sz="922" b="1" i="0">
-                <a:solidFill>
-                  <a:srgbClr val="111111"/>
-                </a:solidFill>
-                <a:latin typeface="Versos"/>
-              </a:rPr>
-              <a:t>5,37%</a:t>
-            </a:r>
-          </a:p>
-        </p:txBody>
-      </p:sp>
-      <p:sp>
-        <p:nvSpPr>
-          <p:cNvPr id="13" name="TextBox 12"/>
-          <p:cNvSpPr txBox="1"/>
-          <p:nvPr/>
-        </p:nvSpPr>
-        <p:spPr>
-          <a:xfrm>
-            <a:off x="400680" y="2658875"/>
-            <a:ext cx="1541030" cy="120960"/>
+              <a:t>TI e Telecomunicações</a:t>
+            </a:r>
+          </a:p>
+        </p:txBody>
+      </p:sp>
+      <p:sp>
+        <p:nvSpPr>
+          <p:cNvPr id="20" name="TextBox 19"/>
+          <p:cNvSpPr txBox="1"/>
+          <p:nvPr/>
+        </p:nvSpPr>
+        <p:spPr>
+          <a:xfrm>
+            <a:off x="2153300" y="2923357"/>
+            <a:ext cx="335011" cy="120960"/>
+          </a:xfrm>
+          <a:prstGeom prst="rect">
+            <a:avLst/>
+          </a:prstGeom>
+          <a:noFill/>
+        </p:spPr>
+        <p:txBody>
+          <a:bodyPr wrap="none" lIns="0" rIns="0" tIns="0" bIns="0" anchor="t"/>
+          <a:lstStyle/>
+          <a:p>
+            <a:pPr algn="l">
+              <a:lnSpc>
+                <a:spcPts val="971"/>
+              </a:lnSpc>
+            </a:pPr>
+            <a:r>
+              <a:rPr sz="809" b="0" i="0">
+                <a:solidFill>
+                  <a:srgbClr val="4F7A93"/>
+                </a:solidFill>
+                <a:latin typeface="Versos"/>
+              </a:rPr>
+              <a:t>4,34%</a:t>
+            </a:r>
+          </a:p>
+        </p:txBody>
+      </p:sp>
+      <p:sp>
+        <p:nvSpPr>
+          <p:cNvPr id="21" name="TextBox 20"/>
+          <p:cNvSpPr txBox="1"/>
+          <p:nvPr/>
+        </p:nvSpPr>
+        <p:spPr>
+          <a:xfrm>
+            <a:off x="400680" y="3112948"/>
+            <a:ext cx="1541030" cy="113400"/>
           </a:xfrm>
           <a:prstGeom prst="rect">
             <a:avLst/>
@@ -5788,142 +6084,290 @@
           <a:p>
             <a:pPr algn="r">
               <a:lnSpc>
-                <a:spcPts val="890"/>
+                <a:spcPts val="825"/>
+              </a:lnSpc>
+            </a:pPr>
+            <a:r>
+              <a:rPr sz="750" b="0" i="0">
+                <a:solidFill>
+                  <a:srgbClr val="222222"/>
+                </a:solidFill>
+                <a:latin typeface="Versos"/>
+              </a:rPr>
+              <a:t>Consignados</a:t>
+            </a:r>
+          </a:p>
+        </p:txBody>
+      </p:sp>
+      <p:sp>
+        <p:nvSpPr>
+          <p:cNvPr id="22" name="TextBox 21"/>
+          <p:cNvSpPr txBox="1"/>
+          <p:nvPr/>
+        </p:nvSpPr>
+        <p:spPr>
+          <a:xfrm>
+            <a:off x="2140661" y="3112357"/>
+            <a:ext cx="330097" cy="120960"/>
+          </a:xfrm>
+          <a:prstGeom prst="rect">
+            <a:avLst/>
+          </a:prstGeom>
+          <a:noFill/>
+        </p:spPr>
+        <p:txBody>
+          <a:bodyPr wrap="none" lIns="0" rIns="0" tIns="0" bIns="0" anchor="t"/>
+          <a:lstStyle/>
+          <a:p>
+            <a:pPr algn="l">
+              <a:lnSpc>
+                <a:spcPts val="971"/>
               </a:lnSpc>
             </a:pPr>
             <a:r>
               <a:rPr sz="809" b="0" i="0">
                 <a:solidFill>
+                  <a:srgbClr val="4F7A93"/>
+                </a:solidFill>
+                <a:latin typeface="Versos"/>
+              </a:rPr>
+              <a:t>3,92%</a:t>
+            </a:r>
+          </a:p>
+        </p:txBody>
+      </p:sp>
+      <p:sp>
+        <p:nvSpPr>
+          <p:cNvPr id="23" name="TextBox 22"/>
+          <p:cNvSpPr txBox="1"/>
+          <p:nvPr/>
+        </p:nvSpPr>
+        <p:spPr>
+          <a:xfrm>
+            <a:off x="400680" y="3301948"/>
+            <a:ext cx="1541030" cy="113400"/>
+          </a:xfrm>
+          <a:prstGeom prst="rect">
+            <a:avLst/>
+          </a:prstGeom>
+          <a:noFill/>
+        </p:spPr>
+        <p:txBody>
+          <a:bodyPr wrap="none" lIns="0" rIns="0" tIns="0" bIns="0" anchor="t"/>
+          <a:lstStyle/>
+          <a:p>
+            <a:pPr algn="r">
+              <a:lnSpc>
+                <a:spcPts val="825"/>
+              </a:lnSpc>
+            </a:pPr>
+            <a:r>
+              <a:rPr sz="750" b="0" i="0">
+                <a:solidFill>
                   <a:srgbClr val="222222"/>
                 </a:solidFill>
                 <a:latin typeface="Versos"/>
               </a:rPr>
-              <a:t>Transporte e Logística</a:t>
-            </a:r>
-          </a:p>
-        </p:txBody>
-      </p:sp>
-      <p:sp>
-        <p:nvSpPr>
-          <p:cNvPr id="14" name="TextBox 13"/>
-          <p:cNvSpPr txBox="1"/>
-          <p:nvPr/>
-        </p:nvSpPr>
-        <p:spPr>
-          <a:xfrm>
-            <a:off x="2170428" y="2651197"/>
-            <a:ext cx="389680" cy="143640"/>
-          </a:xfrm>
-          <a:prstGeom prst="rect">
-            <a:avLst/>
-          </a:prstGeom>
-          <a:noFill/>
-        </p:spPr>
-        <p:txBody>
-          <a:bodyPr wrap="none" lIns="0" rIns="0" tIns="0" bIns="0" anchor="t"/>
-          <a:lstStyle/>
-          <a:p>
-            <a:pPr algn="l">
-              <a:lnSpc>
-                <a:spcPts val="1107"/>
-              </a:lnSpc>
-            </a:pPr>
-            <a:r>
-              <a:rPr sz="922" b="1" i="0">
-                <a:solidFill>
-                  <a:srgbClr val="111111"/>
-                </a:solidFill>
-                <a:latin typeface="Versos"/>
-              </a:rPr>
-              <a:t>4,93%</a:t>
-            </a:r>
-          </a:p>
-        </p:txBody>
-      </p:sp>
-      <p:sp>
-        <p:nvSpPr>
-          <p:cNvPr id="15" name="TextBox 14"/>
-          <p:cNvSpPr txBox="1"/>
-          <p:nvPr/>
-        </p:nvSpPr>
-        <p:spPr>
-          <a:xfrm>
-            <a:off x="400680" y="2859451"/>
-            <a:ext cx="1481760" cy="234005"/>
-          </a:xfrm>
-          <a:prstGeom prst="rect">
-            <a:avLst/>
-          </a:prstGeom>
-          <a:noFill/>
-        </p:spPr>
-        <p:txBody>
-          <a:bodyPr wrap="square" lIns="0" rIns="0" tIns="0" bIns="0" anchor="t"/>
+              <a:t>Energia Elétrica</a:t>
+            </a:r>
+          </a:p>
+        </p:txBody>
+      </p:sp>
+      <p:sp>
+        <p:nvSpPr>
+          <p:cNvPr id="24" name="TextBox 23"/>
+          <p:cNvSpPr txBox="1"/>
+          <p:nvPr/>
+        </p:nvSpPr>
+        <p:spPr>
+          <a:xfrm>
+            <a:off x="2094238" y="3301357"/>
+            <a:ext cx="333660" cy="120960"/>
+          </a:xfrm>
+          <a:prstGeom prst="rect">
+            <a:avLst/>
+          </a:prstGeom>
+          <a:noFill/>
+        </p:spPr>
+        <p:txBody>
+          <a:bodyPr wrap="none" lIns="0" rIns="0" tIns="0" bIns="0" anchor="t"/>
+          <a:lstStyle/>
+          <a:p>
+            <a:pPr algn="l">
+              <a:lnSpc>
+                <a:spcPts val="971"/>
+              </a:lnSpc>
+            </a:pPr>
+            <a:r>
+              <a:rPr sz="809" b="0" i="0">
+                <a:solidFill>
+                  <a:srgbClr val="4F7A93"/>
+                </a:solidFill>
+                <a:latin typeface="Versos"/>
+              </a:rPr>
+              <a:t>2,33%</a:t>
+            </a:r>
+          </a:p>
+        </p:txBody>
+      </p:sp>
+      <p:sp>
+        <p:nvSpPr>
+          <p:cNvPr id="25" name="TextBox 24"/>
+          <p:cNvSpPr txBox="1"/>
+          <p:nvPr/>
+        </p:nvSpPr>
+        <p:spPr>
+          <a:xfrm>
+            <a:off x="400680" y="3490948"/>
+            <a:ext cx="1541030" cy="113400"/>
+          </a:xfrm>
+          <a:prstGeom prst="rect">
+            <a:avLst/>
+          </a:prstGeom>
+          <a:noFill/>
+        </p:spPr>
+        <p:txBody>
+          <a:bodyPr wrap="none" lIns="0" rIns="0" tIns="0" bIns="0" anchor="t"/>
           <a:lstStyle/>
           <a:p>
             <a:pPr algn="r">
               <a:lnSpc>
-                <a:spcPts val="890"/>
+                <a:spcPts val="825"/>
+              </a:lnSpc>
+            </a:pPr>
+            <a:r>
+              <a:rPr sz="750" b="0" i="0">
+                <a:solidFill>
+                  <a:srgbClr val="222222"/>
+                </a:solidFill>
+                <a:latin typeface="Versos"/>
+              </a:rPr>
+              <a:t>Saneamento</a:t>
+            </a:r>
+          </a:p>
+        </p:txBody>
+      </p:sp>
+      <p:sp>
+        <p:nvSpPr>
+          <p:cNvPr id="26" name="TextBox 25"/>
+          <p:cNvSpPr txBox="1"/>
+          <p:nvPr/>
+        </p:nvSpPr>
+        <p:spPr>
+          <a:xfrm>
+            <a:off x="2090812" y="3490357"/>
+            <a:ext cx="302211" cy="120960"/>
+          </a:xfrm>
+          <a:prstGeom prst="rect">
+            <a:avLst/>
+          </a:prstGeom>
+          <a:noFill/>
+        </p:spPr>
+        <p:txBody>
+          <a:bodyPr wrap="none" lIns="0" rIns="0" tIns="0" bIns="0" anchor="t"/>
+          <a:lstStyle/>
+          <a:p>
+            <a:pPr algn="l">
+              <a:lnSpc>
+                <a:spcPts val="971"/>
               </a:lnSpc>
             </a:pPr>
             <a:r>
               <a:rPr sz="809" b="0" i="0">
                 <a:solidFill>
+                  <a:srgbClr val="4F7A93"/>
+                </a:solidFill>
+                <a:latin typeface="Versos"/>
+              </a:rPr>
+              <a:t>2,21%</a:t>
+            </a:r>
+          </a:p>
+        </p:txBody>
+      </p:sp>
+      <p:sp>
+        <p:nvSpPr>
+          <p:cNvPr id="27" name="TextBox 26"/>
+          <p:cNvSpPr txBox="1"/>
+          <p:nvPr/>
+        </p:nvSpPr>
+        <p:spPr>
+          <a:xfrm>
+            <a:off x="400680" y="3679948"/>
+            <a:ext cx="1541030" cy="113400"/>
+          </a:xfrm>
+          <a:prstGeom prst="rect">
+            <a:avLst/>
+          </a:prstGeom>
+          <a:noFill/>
+        </p:spPr>
+        <p:txBody>
+          <a:bodyPr wrap="none" lIns="0" rIns="0" tIns="0" bIns="0" anchor="t"/>
+          <a:lstStyle/>
+          <a:p>
+            <a:pPr algn="r">
+              <a:lnSpc>
+                <a:spcPts val="825"/>
+              </a:lnSpc>
+            </a:pPr>
+            <a:r>
+              <a:rPr sz="750" b="0" i="0">
+                <a:solidFill>
                   <a:srgbClr val="222222"/>
                 </a:solidFill>
                 <a:latin typeface="Versos"/>
               </a:rPr>
-              <a:t>Comércio atacadista e varejista</a:t>
-            </a:r>
-          </a:p>
-        </p:txBody>
-      </p:sp>
-      <p:sp>
-        <p:nvSpPr>
-          <p:cNvPr id="16" name="TextBox 15"/>
-          <p:cNvSpPr txBox="1"/>
-          <p:nvPr/>
-        </p:nvSpPr>
-        <p:spPr>
-          <a:xfrm>
-            <a:off x="2158616" y="2908237"/>
-            <a:ext cx="387223" cy="143640"/>
-          </a:xfrm>
-          <a:prstGeom prst="rect">
-            <a:avLst/>
-          </a:prstGeom>
-          <a:noFill/>
-        </p:spPr>
-        <p:txBody>
-          <a:bodyPr wrap="none" lIns="0" rIns="0" tIns="0" bIns="0" anchor="t"/>
-          <a:lstStyle/>
-          <a:p>
-            <a:pPr algn="l">
-              <a:lnSpc>
-                <a:spcPts val="1107"/>
-              </a:lnSpc>
-            </a:pPr>
-            <a:r>
-              <a:rPr sz="922" b="1" i="0">
-                <a:solidFill>
-                  <a:srgbClr val="111111"/>
-                </a:solidFill>
-                <a:latin typeface="Versos"/>
-              </a:rPr>
-              <a:t>4,52%</a:t>
-            </a:r>
-          </a:p>
-        </p:txBody>
-      </p:sp>
-      <p:sp>
-        <p:nvSpPr>
-          <p:cNvPr id="17" name="TextBox 16"/>
-          <p:cNvSpPr txBox="1"/>
-          <p:nvPr/>
-        </p:nvSpPr>
-        <p:spPr>
-          <a:xfrm>
-            <a:off x="400680" y="3172955"/>
-            <a:ext cx="1541030" cy="120960"/>
+              <a:t>Alimentos e bebidas</a:t>
+            </a:r>
+          </a:p>
+        </p:txBody>
+      </p:sp>
+      <p:sp>
+        <p:nvSpPr>
+          <p:cNvPr id="28" name="TextBox 27"/>
+          <p:cNvSpPr txBox="1"/>
+          <p:nvPr/>
+        </p:nvSpPr>
+        <p:spPr>
+          <a:xfrm>
+            <a:off x="2067069" y="3679357"/>
+            <a:ext cx="313636" cy="120960"/>
+          </a:xfrm>
+          <a:prstGeom prst="rect">
+            <a:avLst/>
+          </a:prstGeom>
+          <a:noFill/>
+        </p:spPr>
+        <p:txBody>
+          <a:bodyPr wrap="none" lIns="0" rIns="0" tIns="0" bIns="0" anchor="t"/>
+          <a:lstStyle/>
+          <a:p>
+            <a:pPr algn="l">
+              <a:lnSpc>
+                <a:spcPts val="971"/>
+              </a:lnSpc>
+            </a:pPr>
+            <a:r>
+              <a:rPr sz="809" b="0" i="0">
+                <a:solidFill>
+                  <a:srgbClr val="4F7A93"/>
+                </a:solidFill>
+                <a:latin typeface="Versos"/>
+              </a:rPr>
+              <a:t>1,40%</a:t>
+            </a:r>
+          </a:p>
+        </p:txBody>
+      </p:sp>
+      <p:sp>
+        <p:nvSpPr>
+          <p:cNvPr id="29" name="TextBox 28"/>
+          <p:cNvSpPr txBox="1"/>
+          <p:nvPr/>
+        </p:nvSpPr>
+        <p:spPr>
+          <a:xfrm>
+            <a:off x="400680" y="3868948"/>
+            <a:ext cx="1541030" cy="113400"/>
           </a:xfrm>
           <a:prstGeom prst="rect">
             <a:avLst/>
@@ -5936,68 +6380,142 @@
           <a:p>
             <a:pPr algn="r">
               <a:lnSpc>
-                <a:spcPts val="890"/>
+                <a:spcPts val="825"/>
+              </a:lnSpc>
+            </a:pPr>
+            <a:r>
+              <a:rPr sz="750" b="0" i="0">
+                <a:solidFill>
+                  <a:srgbClr val="222222"/>
+                </a:solidFill>
+                <a:latin typeface="Versos"/>
+              </a:rPr>
+              <a:t>Assistência médica</a:t>
+            </a:r>
+          </a:p>
+        </p:txBody>
+      </p:sp>
+      <p:sp>
+        <p:nvSpPr>
+          <p:cNvPr id="30" name="TextBox 29"/>
+          <p:cNvSpPr txBox="1"/>
+          <p:nvPr/>
+        </p:nvSpPr>
+        <p:spPr>
+          <a:xfrm>
+            <a:off x="2065770" y="3868357"/>
+            <a:ext cx="310319" cy="120960"/>
+          </a:xfrm>
+          <a:prstGeom prst="rect">
+            <a:avLst/>
+          </a:prstGeom>
+          <a:noFill/>
+        </p:spPr>
+        <p:txBody>
+          <a:bodyPr wrap="none" lIns="0" rIns="0" tIns="0" bIns="0" anchor="t"/>
+          <a:lstStyle/>
+          <a:p>
+            <a:pPr algn="l">
+              <a:lnSpc>
+                <a:spcPts val="971"/>
               </a:lnSpc>
             </a:pPr>
             <a:r>
               <a:rPr sz="809" b="0" i="0">
                 <a:solidFill>
+                  <a:srgbClr val="4F7A93"/>
+                </a:solidFill>
+                <a:latin typeface="Versos"/>
+              </a:rPr>
+              <a:t>1,36%</a:t>
+            </a:r>
+          </a:p>
+        </p:txBody>
+      </p:sp>
+      <p:sp>
+        <p:nvSpPr>
+          <p:cNvPr id="31" name="TextBox 30"/>
+          <p:cNvSpPr txBox="1"/>
+          <p:nvPr/>
+        </p:nvSpPr>
+        <p:spPr>
+          <a:xfrm>
+            <a:off x="400680" y="4057948"/>
+            <a:ext cx="1541030" cy="113400"/>
+          </a:xfrm>
+          <a:prstGeom prst="rect">
+            <a:avLst/>
+          </a:prstGeom>
+          <a:noFill/>
+        </p:spPr>
+        <p:txBody>
+          <a:bodyPr wrap="none" lIns="0" rIns="0" tIns="0" bIns="0" anchor="t"/>
+          <a:lstStyle/>
+          <a:p>
+            <a:pPr algn="r">
+              <a:lnSpc>
+                <a:spcPts val="825"/>
+              </a:lnSpc>
+            </a:pPr>
+            <a:r>
+              <a:rPr sz="750" b="0" i="0">
+                <a:solidFill>
                   <a:srgbClr val="222222"/>
                 </a:solidFill>
                 <a:latin typeface="Versos"/>
               </a:rPr>
-              <a:t>Crédito PF</a:t>
-            </a:r>
-          </a:p>
-        </p:txBody>
-      </p:sp>
-      <p:sp>
-        <p:nvSpPr>
-          <p:cNvPr id="18" name="TextBox 17"/>
-          <p:cNvSpPr txBox="1"/>
-          <p:nvPr/>
-        </p:nvSpPr>
-        <p:spPr>
-          <a:xfrm>
-            <a:off x="2155781" y="3165277"/>
-            <a:ext cx="393488" cy="143640"/>
-          </a:xfrm>
-          <a:prstGeom prst="rect">
-            <a:avLst/>
-          </a:prstGeom>
-          <a:noFill/>
-        </p:spPr>
-        <p:txBody>
-          <a:bodyPr wrap="none" lIns="0" rIns="0" tIns="0" bIns="0" anchor="t"/>
-          <a:lstStyle/>
-          <a:p>
-            <a:pPr algn="l">
-              <a:lnSpc>
-                <a:spcPts val="1107"/>
-              </a:lnSpc>
-            </a:pPr>
-            <a:r>
-              <a:rPr sz="922" b="1" i="0">
-                <a:solidFill>
-                  <a:srgbClr val="111111"/>
-                </a:solidFill>
-                <a:latin typeface="Versos"/>
-              </a:rPr>
-              <a:t>4,43%</a:t>
-            </a:r>
-          </a:p>
-        </p:txBody>
-      </p:sp>
-      <p:sp>
-        <p:nvSpPr>
-          <p:cNvPr id="19" name="TextBox 18"/>
-          <p:cNvSpPr txBox="1"/>
-          <p:nvPr/>
-        </p:nvSpPr>
-        <p:spPr>
-          <a:xfrm>
-            <a:off x="400680" y="3429995"/>
-            <a:ext cx="1541030" cy="120960"/>
+              <a:t>Serviços Imobiliários</a:t>
+            </a:r>
+          </a:p>
+        </p:txBody>
+      </p:sp>
+      <p:sp>
+        <p:nvSpPr>
+          <p:cNvPr id="32" name="TextBox 31"/>
+          <p:cNvSpPr txBox="1"/>
+          <p:nvPr/>
+        </p:nvSpPr>
+        <p:spPr>
+          <a:xfrm>
+            <a:off x="2059509" y="4057357"/>
+            <a:ext cx="270392" cy="120960"/>
+          </a:xfrm>
+          <a:prstGeom prst="rect">
+            <a:avLst/>
+          </a:prstGeom>
+          <a:noFill/>
+        </p:spPr>
+        <p:txBody>
+          <a:bodyPr wrap="none" lIns="0" rIns="0" tIns="0" bIns="0" anchor="t"/>
+          <a:lstStyle/>
+          <a:p>
+            <a:pPr algn="l">
+              <a:lnSpc>
+                <a:spcPts val="971"/>
+              </a:lnSpc>
+            </a:pPr>
+            <a:r>
+              <a:rPr sz="809" b="0" i="0">
+                <a:solidFill>
+                  <a:srgbClr val="4F7A93"/>
+                </a:solidFill>
+                <a:latin typeface="Versos"/>
+              </a:rPr>
+              <a:t>1,14%</a:t>
+            </a:r>
+          </a:p>
+        </p:txBody>
+      </p:sp>
+      <p:sp>
+        <p:nvSpPr>
+          <p:cNvPr id="33" name="TextBox 32"/>
+          <p:cNvSpPr txBox="1"/>
+          <p:nvPr/>
+        </p:nvSpPr>
+        <p:spPr>
+          <a:xfrm>
+            <a:off x="400680" y="4246948"/>
+            <a:ext cx="1541030" cy="113400"/>
           </a:xfrm>
           <a:prstGeom prst="rect">
             <a:avLst/>
@@ -6010,357 +6528,61 @@
           <a:p>
             <a:pPr algn="r">
               <a:lnSpc>
-                <a:spcPts val="890"/>
+                <a:spcPts val="825"/>
+              </a:lnSpc>
+            </a:pPr>
+            <a:r>
+              <a:rPr sz="750" b="0" i="0">
+                <a:solidFill>
+                  <a:srgbClr val="222222"/>
+                </a:solidFill>
+                <a:latin typeface="Versos"/>
+              </a:rPr>
+              <a:t>Agropecuária</a:t>
+            </a:r>
+          </a:p>
+        </p:txBody>
+      </p:sp>
+      <p:sp>
+        <p:nvSpPr>
+          <p:cNvPr id="34" name="TextBox 33"/>
+          <p:cNvSpPr txBox="1"/>
+          <p:nvPr/>
+        </p:nvSpPr>
+        <p:spPr>
+          <a:xfrm>
+            <a:off x="2054430" y="4246357"/>
+            <a:ext cx="326043" cy="120960"/>
+          </a:xfrm>
+          <a:prstGeom prst="rect">
+            <a:avLst/>
+          </a:prstGeom>
+          <a:noFill/>
+        </p:spPr>
+        <p:txBody>
+          <a:bodyPr wrap="none" lIns="0" rIns="0" tIns="0" bIns="0" anchor="t"/>
+          <a:lstStyle/>
+          <a:p>
+            <a:pPr algn="l">
+              <a:lnSpc>
+                <a:spcPts val="971"/>
               </a:lnSpc>
             </a:pPr>
             <a:r>
               <a:rPr sz="809" b="0" i="0">
                 <a:solidFill>
-                  <a:srgbClr val="222222"/>
-                </a:solidFill>
-                <a:latin typeface="Versos"/>
-              </a:rPr>
-              <a:t>TI e Telecomunicações</a:t>
-            </a:r>
-          </a:p>
-        </p:txBody>
-      </p:sp>
-      <p:sp>
-        <p:nvSpPr>
-          <p:cNvPr id="20" name="TextBox 19"/>
-          <p:cNvSpPr txBox="1"/>
-          <p:nvPr/>
-        </p:nvSpPr>
-        <p:spPr>
-          <a:xfrm>
-            <a:off x="2153300" y="3422317"/>
-            <a:ext cx="387714" cy="143640"/>
-          </a:xfrm>
-          <a:prstGeom prst="rect">
-            <a:avLst/>
-          </a:prstGeom>
-          <a:noFill/>
-        </p:spPr>
-        <p:txBody>
-          <a:bodyPr wrap="none" lIns="0" rIns="0" tIns="0" bIns="0" anchor="t"/>
-          <a:lstStyle/>
-          <a:p>
-            <a:pPr algn="l">
-              <a:lnSpc>
-                <a:spcPts val="1107"/>
-              </a:lnSpc>
-            </a:pPr>
-            <a:r>
-              <a:rPr sz="922" b="1" i="0">
-                <a:solidFill>
-                  <a:srgbClr val="111111"/>
-                </a:solidFill>
-                <a:latin typeface="Versos"/>
-              </a:rPr>
-              <a:t>4,34%</a:t>
-            </a:r>
-          </a:p>
-        </p:txBody>
-      </p:sp>
-      <p:sp>
-        <p:nvSpPr>
-          <p:cNvPr id="21" name="TextBox 20"/>
-          <p:cNvSpPr txBox="1"/>
-          <p:nvPr/>
-        </p:nvSpPr>
-        <p:spPr>
-          <a:xfrm>
-            <a:off x="400680" y="3687035"/>
-            <a:ext cx="1541030" cy="120960"/>
-          </a:xfrm>
-          <a:prstGeom prst="rect">
-            <a:avLst/>
-          </a:prstGeom>
-          <a:noFill/>
-        </p:spPr>
-        <p:txBody>
-          <a:bodyPr wrap="none" lIns="0" rIns="0" tIns="0" bIns="0" anchor="t"/>
-          <a:lstStyle/>
-          <a:p>
-            <a:pPr algn="r">
-              <a:lnSpc>
-                <a:spcPts val="890"/>
-              </a:lnSpc>
-            </a:pPr>
-            <a:r>
-              <a:rPr sz="809" b="0" i="0">
-                <a:solidFill>
-                  <a:srgbClr val="222222"/>
-                </a:solidFill>
-                <a:latin typeface="Versos"/>
-              </a:rPr>
-              <a:t>Consignados</a:t>
-            </a:r>
-          </a:p>
-        </p:txBody>
-      </p:sp>
-      <p:sp>
-        <p:nvSpPr>
-          <p:cNvPr id="22" name="TextBox 21"/>
-          <p:cNvSpPr txBox="1"/>
-          <p:nvPr/>
-        </p:nvSpPr>
-        <p:spPr>
-          <a:xfrm>
-            <a:off x="2140661" y="3679357"/>
-            <a:ext cx="381080" cy="143640"/>
-          </a:xfrm>
-          <a:prstGeom prst="rect">
-            <a:avLst/>
-          </a:prstGeom>
-          <a:noFill/>
-        </p:spPr>
-        <p:txBody>
-          <a:bodyPr wrap="none" lIns="0" rIns="0" tIns="0" bIns="0" anchor="t"/>
-          <a:lstStyle/>
-          <a:p>
-            <a:pPr algn="l">
-              <a:lnSpc>
-                <a:spcPts val="1107"/>
-              </a:lnSpc>
-            </a:pPr>
-            <a:r>
-              <a:rPr sz="922" b="1" i="0">
-                <a:solidFill>
-                  <a:srgbClr val="111111"/>
-                </a:solidFill>
-                <a:latin typeface="Versos"/>
-              </a:rPr>
-              <a:t>3,92%</a:t>
-            </a:r>
-          </a:p>
-        </p:txBody>
-      </p:sp>
-      <p:sp>
-        <p:nvSpPr>
-          <p:cNvPr id="23" name="TextBox 22"/>
-          <p:cNvSpPr txBox="1"/>
-          <p:nvPr/>
-        </p:nvSpPr>
-        <p:spPr>
-          <a:xfrm>
-            <a:off x="400680" y="3944075"/>
-            <a:ext cx="1541030" cy="120960"/>
-          </a:xfrm>
-          <a:prstGeom prst="rect">
-            <a:avLst/>
-          </a:prstGeom>
-          <a:noFill/>
-        </p:spPr>
-        <p:txBody>
-          <a:bodyPr wrap="none" lIns="0" rIns="0" tIns="0" bIns="0" anchor="t"/>
-          <a:lstStyle/>
-          <a:p>
-            <a:pPr algn="r">
-              <a:lnSpc>
-                <a:spcPts val="890"/>
-              </a:lnSpc>
-            </a:pPr>
-            <a:r>
-              <a:rPr sz="809" b="0" i="0">
-                <a:solidFill>
-                  <a:srgbClr val="222222"/>
-                </a:solidFill>
-                <a:latin typeface="Versos"/>
-              </a:rPr>
-              <a:t>Energia Elétrica</a:t>
-            </a:r>
-          </a:p>
-        </p:txBody>
-      </p:sp>
-      <p:sp>
-        <p:nvSpPr>
-          <p:cNvPr id="24" name="TextBox 23"/>
-          <p:cNvSpPr txBox="1"/>
-          <p:nvPr/>
-        </p:nvSpPr>
-        <p:spPr>
-          <a:xfrm>
-            <a:off x="2094238" y="3936397"/>
-            <a:ext cx="384766" cy="143640"/>
-          </a:xfrm>
-          <a:prstGeom prst="rect">
-            <a:avLst/>
-          </a:prstGeom>
-          <a:noFill/>
-        </p:spPr>
-        <p:txBody>
-          <a:bodyPr wrap="none" lIns="0" rIns="0" tIns="0" bIns="0" anchor="t"/>
-          <a:lstStyle/>
-          <a:p>
-            <a:pPr algn="l">
-              <a:lnSpc>
-                <a:spcPts val="1107"/>
-              </a:lnSpc>
-            </a:pPr>
-            <a:r>
-              <a:rPr sz="922" b="1" i="0">
-                <a:solidFill>
-                  <a:srgbClr val="111111"/>
-                </a:solidFill>
-                <a:latin typeface="Versos"/>
-              </a:rPr>
-              <a:t>2,33%</a:t>
-            </a:r>
-          </a:p>
-        </p:txBody>
-      </p:sp>
-      <p:sp>
-        <p:nvSpPr>
-          <p:cNvPr id="25" name="TextBox 24"/>
-          <p:cNvSpPr txBox="1"/>
-          <p:nvPr/>
-        </p:nvSpPr>
-        <p:spPr>
-          <a:xfrm>
-            <a:off x="400680" y="4201115"/>
-            <a:ext cx="1541030" cy="120960"/>
-          </a:xfrm>
-          <a:prstGeom prst="rect">
-            <a:avLst/>
-          </a:prstGeom>
-          <a:noFill/>
-        </p:spPr>
-        <p:txBody>
-          <a:bodyPr wrap="none" lIns="0" rIns="0" tIns="0" bIns="0" anchor="t"/>
-          <a:lstStyle/>
-          <a:p>
-            <a:pPr algn="r">
-              <a:lnSpc>
-                <a:spcPts val="890"/>
-              </a:lnSpc>
-            </a:pPr>
-            <a:r>
-              <a:rPr sz="809" b="0" i="0">
-                <a:solidFill>
-                  <a:srgbClr val="222222"/>
-                </a:solidFill>
-                <a:latin typeface="Versos"/>
-              </a:rPr>
-              <a:t>Saneamento</a:t>
-            </a:r>
-          </a:p>
-        </p:txBody>
-      </p:sp>
-      <p:sp>
-        <p:nvSpPr>
-          <p:cNvPr id="26" name="TextBox 25"/>
-          <p:cNvSpPr txBox="1"/>
-          <p:nvPr/>
-        </p:nvSpPr>
-        <p:spPr>
-          <a:xfrm>
-            <a:off x="2090812" y="4193437"/>
-            <a:ext cx="350368" cy="143640"/>
-          </a:xfrm>
-          <a:prstGeom prst="rect">
-            <a:avLst/>
-          </a:prstGeom>
-          <a:noFill/>
-        </p:spPr>
-        <p:txBody>
-          <a:bodyPr wrap="none" lIns="0" rIns="0" tIns="0" bIns="0" anchor="t"/>
-          <a:lstStyle/>
-          <a:p>
-            <a:pPr algn="l">
-              <a:lnSpc>
-                <a:spcPts val="1107"/>
-              </a:lnSpc>
-            </a:pPr>
-            <a:r>
-              <a:rPr sz="922" b="1" i="0">
-                <a:solidFill>
-                  <a:srgbClr val="111111"/>
-                </a:solidFill>
-                <a:latin typeface="Versos"/>
-              </a:rPr>
-              <a:t>2,21%</a:t>
-            </a:r>
-          </a:p>
-        </p:txBody>
-      </p:sp>
-      <p:sp>
-        <p:nvSpPr>
-          <p:cNvPr id="27" name="TextBox 26"/>
-          <p:cNvSpPr txBox="1"/>
-          <p:nvPr/>
-        </p:nvSpPr>
-        <p:spPr>
-          <a:xfrm>
-            <a:off x="400680" y="4458155"/>
-            <a:ext cx="1541030" cy="120960"/>
-          </a:xfrm>
-          <a:prstGeom prst="rect">
-            <a:avLst/>
-          </a:prstGeom>
-          <a:noFill/>
-        </p:spPr>
-        <p:txBody>
-          <a:bodyPr wrap="none" lIns="0" rIns="0" tIns="0" bIns="0" anchor="t"/>
-          <a:lstStyle/>
-          <a:p>
-            <a:pPr algn="r">
-              <a:lnSpc>
-                <a:spcPts val="890"/>
-              </a:lnSpc>
-            </a:pPr>
-            <a:r>
-              <a:rPr sz="809" b="0" i="0">
-                <a:solidFill>
-                  <a:srgbClr val="222222"/>
-                </a:solidFill>
-                <a:latin typeface="Versos"/>
-              </a:rPr>
-              <a:t>Alimentos e bebidas</a:t>
-            </a:r>
-          </a:p>
-        </p:txBody>
-      </p:sp>
-      <p:sp>
-        <p:nvSpPr>
-          <p:cNvPr id="28" name="TextBox 27"/>
-          <p:cNvSpPr txBox="1"/>
-          <p:nvPr/>
-        </p:nvSpPr>
-        <p:spPr>
-          <a:xfrm>
-            <a:off x="2067069" y="4450477"/>
-            <a:ext cx="363758" cy="143640"/>
-          </a:xfrm>
-          <a:prstGeom prst="rect">
-            <a:avLst/>
-          </a:prstGeom>
-          <a:noFill/>
-        </p:spPr>
-        <p:txBody>
-          <a:bodyPr wrap="none" lIns="0" rIns="0" tIns="0" bIns="0" anchor="t"/>
-          <a:lstStyle/>
-          <a:p>
-            <a:pPr algn="l">
-              <a:lnSpc>
-                <a:spcPts val="1107"/>
-              </a:lnSpc>
-            </a:pPr>
-            <a:r>
-              <a:rPr sz="922" b="1" i="0">
-                <a:solidFill>
-                  <a:srgbClr val="111111"/>
-                </a:solidFill>
-                <a:latin typeface="Versos"/>
-              </a:rPr>
-              <a:t>1,40%</a:t>
-            </a:r>
-          </a:p>
-        </p:txBody>
-      </p:sp>
-      <p:sp>
-        <p:nvSpPr>
-          <p:cNvPr id="29" name="TextBox 28"/>
+                  <a:srgbClr val="4F7A93"/>
+                </a:solidFill>
+                <a:latin typeface="Versos"/>
+              </a:rPr>
+              <a:t>0,97%</a:t>
+            </a:r>
+          </a:p>
+        </p:txBody>
+      </p:sp>
+      <p:sp>
+        <p:nvSpPr>
+          <p:cNvPr id="35" name="TextBox 34"/>
           <p:cNvSpPr txBox="1"/>
           <p:nvPr/>
         </p:nvSpPr>
@@ -6397,7 +6619,7 @@
       </p:sp>
       <p:sp>
         <p:nvSpPr>
-          <p:cNvPr id="30" name="TextBox 29"/>
+          <p:cNvPr id="36" name="TextBox 35"/>
           <p:cNvSpPr txBox="1"/>
           <p:nvPr/>
         </p:nvSpPr>
@@ -6434,7 +6656,7 @@
       </p:sp>
       <p:sp>
         <p:nvSpPr>
-          <p:cNvPr id="31" name="TextBox 30"/>
+          <p:cNvPr id="37" name="TextBox 36"/>
           <p:cNvSpPr txBox="1"/>
           <p:nvPr/>
         </p:nvSpPr>
@@ -6471,7 +6693,7 @@
       </p:sp>
       <p:sp>
         <p:nvSpPr>
-          <p:cNvPr id="32" name="TextBox 31"/>
+          <p:cNvPr id="38" name="TextBox 37"/>
           <p:cNvSpPr txBox="1"/>
           <p:nvPr/>
         </p:nvSpPr>
@@ -6508,7 +6730,7 @@
       </p:sp>
       <p:sp>
         <p:nvSpPr>
-          <p:cNvPr id="33" name="TextBox 32"/>
+          <p:cNvPr id="39" name="TextBox 38"/>
           <p:cNvSpPr txBox="1"/>
           <p:nvPr/>
         </p:nvSpPr>
@@ -6545,7 +6767,7 @@
       </p:sp>
       <p:sp>
         <p:nvSpPr>
-          <p:cNvPr id="34" name="TextBox 33"/>
+          <p:cNvPr id="40" name="TextBox 39"/>
           <p:cNvSpPr txBox="1"/>
           <p:nvPr/>
         </p:nvSpPr>
@@ -6582,7 +6804,7 @@
       </p:sp>
       <p:sp>
         <p:nvSpPr>
-          <p:cNvPr id="35" name="TextBox 34"/>
+          <p:cNvPr id="41" name="TextBox 40"/>
           <p:cNvSpPr txBox="1"/>
           <p:nvPr/>
         </p:nvSpPr>
@@ -6619,14 +6841,14 @@
       </p:sp>
       <p:sp>
         <p:nvSpPr>
-          <p:cNvPr id="36" name="TextBox 35"/>
-          <p:cNvSpPr txBox="1"/>
-          <p:nvPr/>
-        </p:nvSpPr>
-        <p:spPr>
-          <a:xfrm>
-            <a:off x="551880" y="5430915"/>
-            <a:ext cx="3302208" cy="151200"/>
+          <p:cNvPr id="42" name="TextBox 41"/>
+          <p:cNvSpPr txBox="1"/>
+          <p:nvPr/>
+        </p:nvSpPr>
+        <p:spPr>
+          <a:xfrm>
+            <a:off x="551880" y="5476275"/>
+            <a:ext cx="2044224" cy="151200"/>
           </a:xfrm>
           <a:prstGeom prst="rect">
             <a:avLst/>
@@ -6656,14 +6878,14 @@
       </p:sp>
       <p:sp>
         <p:nvSpPr>
-          <p:cNvPr id="37" name="TextBox 36"/>
-          <p:cNvSpPr txBox="1"/>
-          <p:nvPr/>
-        </p:nvSpPr>
-        <p:spPr>
-          <a:xfrm>
-            <a:off x="551880" y="5748435"/>
-            <a:ext cx="974937" cy="136080"/>
+          <p:cNvPr id="43" name="TextBox 42"/>
+          <p:cNvSpPr txBox="1"/>
+          <p:nvPr/>
+        </p:nvSpPr>
+        <p:spPr>
+          <a:xfrm>
+            <a:off x="551880" y="5793795"/>
+            <a:ext cx="896313" cy="136080"/>
           </a:xfrm>
           <a:prstGeom prst="rect">
             <a:avLst/>
@@ -6693,14 +6915,14 @@
       </p:sp>
       <p:sp>
         <p:nvSpPr>
-          <p:cNvPr id="38" name="TextBox 37"/>
-          <p:cNvSpPr txBox="1"/>
-          <p:nvPr/>
-        </p:nvSpPr>
-        <p:spPr>
-          <a:xfrm>
-            <a:off x="551880" y="5929875"/>
-            <a:ext cx="974937" cy="151200"/>
+          <p:cNvPr id="44" name="TextBox 43"/>
+          <p:cNvSpPr txBox="1"/>
+          <p:nvPr/>
+        </p:nvSpPr>
+        <p:spPr>
+          <a:xfrm>
+            <a:off x="551880" y="5975235"/>
+            <a:ext cx="896313" cy="151200"/>
           </a:xfrm>
           <a:prstGeom prst="rect">
             <a:avLst/>
@@ -6730,14 +6952,14 @@
       </p:sp>
       <p:sp>
         <p:nvSpPr>
-          <p:cNvPr id="39" name="TextBox 38"/>
-          <p:cNvSpPr txBox="1"/>
-          <p:nvPr/>
-        </p:nvSpPr>
-        <p:spPr>
-          <a:xfrm>
-            <a:off x="551880" y="6065955"/>
-            <a:ext cx="974937" cy="204120"/>
+          <p:cNvPr id="45" name="TextBox 44"/>
+          <p:cNvSpPr txBox="1"/>
+          <p:nvPr/>
+        </p:nvSpPr>
+        <p:spPr>
+          <a:xfrm>
+            <a:off x="551880" y="6111315"/>
+            <a:ext cx="896313" cy="204120"/>
           </a:xfrm>
           <a:prstGeom prst="rect">
             <a:avLst/>
@@ -6767,14 +6989,14 @@
       </p:sp>
       <p:sp>
         <p:nvSpPr>
-          <p:cNvPr id="40" name="TextBox 39"/>
-          <p:cNvSpPr txBox="1"/>
-          <p:nvPr/>
-        </p:nvSpPr>
-        <p:spPr>
-          <a:xfrm>
-            <a:off x="1738800" y="5748435"/>
-            <a:ext cx="841276" cy="136080"/>
+          <p:cNvPr id="46" name="TextBox 45"/>
+          <p:cNvSpPr txBox="1"/>
+          <p:nvPr/>
+        </p:nvSpPr>
+        <p:spPr>
+          <a:xfrm>
+            <a:off x="1663200" y="5793795"/>
+            <a:ext cx="762652" cy="136080"/>
           </a:xfrm>
           <a:prstGeom prst="rect">
             <a:avLst/>
@@ -6797,21 +7019,21 @@
                 </a:solidFill>
                 <a:latin typeface="Versos"/>
               </a:rPr>
-              <a:t>12M</a:t>
-            </a:r>
-          </a:p>
-        </p:txBody>
-      </p:sp>
-      <p:sp>
-        <p:nvSpPr>
-          <p:cNvPr id="41" name="TextBox 40"/>
-          <p:cNvSpPr txBox="1"/>
-          <p:nvPr/>
-        </p:nvSpPr>
-        <p:spPr>
-          <a:xfrm>
-            <a:off x="1738800" y="5929875"/>
-            <a:ext cx="841276" cy="151200"/>
+              <a:t>Mês</a:t>
+            </a:r>
+          </a:p>
+        </p:txBody>
+      </p:sp>
+      <p:sp>
+        <p:nvSpPr>
+          <p:cNvPr id="47" name="TextBox 46"/>
+          <p:cNvSpPr txBox="1"/>
+          <p:nvPr/>
+        </p:nvSpPr>
+        <p:spPr>
+          <a:xfrm>
+            <a:off x="1663200" y="5975235"/>
+            <a:ext cx="762652" cy="151200"/>
           </a:xfrm>
           <a:prstGeom prst="rect">
             <a:avLst/>
@@ -6841,14 +7063,14 @@
       </p:sp>
       <p:sp>
         <p:nvSpPr>
-          <p:cNvPr id="42" name="TextBox 41"/>
-          <p:cNvSpPr txBox="1"/>
-          <p:nvPr/>
-        </p:nvSpPr>
-        <p:spPr>
-          <a:xfrm>
-            <a:off x="1738800" y="6065955"/>
-            <a:ext cx="841276" cy="204120"/>
+          <p:cNvPr id="48" name="TextBox 47"/>
+          <p:cNvSpPr txBox="1"/>
+          <p:nvPr/>
+        </p:nvSpPr>
+        <p:spPr>
+          <a:xfrm>
+            <a:off x="1663200" y="6111315"/>
+            <a:ext cx="762652" cy="204120"/>
           </a:xfrm>
           <a:prstGeom prst="rect">
             <a:avLst/>
@@ -6871,117 +7093,6 @@
                 </a:solidFill>
                 <a:latin typeface="Versos"/>
               </a:rPr>
-              <a:t>−</a:t>
-            </a:r>
-          </a:p>
-        </p:txBody>
-      </p:sp>
-      <p:sp>
-        <p:nvSpPr>
-          <p:cNvPr id="43" name="TextBox 42"/>
-          <p:cNvSpPr txBox="1"/>
-          <p:nvPr/>
-        </p:nvSpPr>
-        <p:spPr>
-          <a:xfrm>
-            <a:off x="2797200" y="5748435"/>
-            <a:ext cx="841276" cy="136080"/>
-          </a:xfrm>
-          <a:prstGeom prst="rect">
-            <a:avLst/>
-          </a:prstGeom>
-          <a:noFill/>
-        </p:spPr>
-        <p:txBody>
-          <a:bodyPr wrap="none" lIns="0" rIns="0" tIns="0" bIns="0" anchor="t"/>
-          <a:lstStyle/>
-          <a:p>
-            <a:pPr algn="l">
-              <a:lnSpc>
-                <a:spcPts val="1035"/>
-              </a:lnSpc>
-            </a:pPr>
-            <a:r>
-              <a:rPr sz="863" b="0" i="0">
-                <a:solidFill>
-                  <a:srgbClr val="FFFFFF"/>
-                </a:solidFill>
-                <a:latin typeface="Versos"/>
-              </a:rPr>
-              <a:t>Mês</a:t>
-            </a:r>
-          </a:p>
-        </p:txBody>
-      </p:sp>
-      <p:sp>
-        <p:nvSpPr>
-          <p:cNvPr id="44" name="TextBox 43"/>
-          <p:cNvSpPr txBox="1"/>
-          <p:nvPr/>
-        </p:nvSpPr>
-        <p:spPr>
-          <a:xfrm>
-            <a:off x="2797200" y="5929875"/>
-            <a:ext cx="841276" cy="151200"/>
-          </a:xfrm>
-          <a:prstGeom prst="rect">
-            <a:avLst/>
-          </a:prstGeom>
-          <a:noFill/>
-        </p:spPr>
-        <p:txBody>
-          <a:bodyPr wrap="none" lIns="0" rIns="0" tIns="0" bIns="0" anchor="t"/>
-          <a:lstStyle/>
-          <a:p>
-            <a:pPr algn="l">
-              <a:lnSpc>
-                <a:spcPts val="1178"/>
-              </a:lnSpc>
-            </a:pPr>
-            <a:r>
-              <a:rPr sz="982" b="1" i="0">
-                <a:solidFill>
-                  <a:srgbClr val="FFFFFF"/>
-                </a:solidFill>
-                <a:latin typeface="Versos"/>
-              </a:rPr>
-              <a:t>CDI +</a:t>
-            </a:r>
-          </a:p>
-        </p:txBody>
-      </p:sp>
-      <p:sp>
-        <p:nvSpPr>
-          <p:cNvPr id="45" name="TextBox 44"/>
-          <p:cNvSpPr txBox="1"/>
-          <p:nvPr/>
-        </p:nvSpPr>
-        <p:spPr>
-          <a:xfrm>
-            <a:off x="2797200" y="6065955"/>
-            <a:ext cx="841276" cy="204120"/>
-          </a:xfrm>
-          <a:prstGeom prst="rect">
-            <a:avLst/>
-          </a:prstGeom>
-          <a:noFill/>
-        </p:spPr>
-        <p:txBody>
-          <a:bodyPr wrap="none" lIns="0" rIns="0" tIns="0" bIns="0" anchor="t"/>
-          <a:lstStyle/>
-          <a:p>
-            <a:pPr algn="l">
-              <a:lnSpc>
-                <a:spcPts val="1440"/>
-              </a:lnSpc>
-            </a:pPr>
-            <a:r>
-              <a:rPr sz="1309" b="1" i="0">
-                <a:solidFill>
-                  <a:srgbClr val="FFFFFF"/>
-                </a:solidFill>
-                <a:latin typeface="Versos"/>
-              </a:rPr>
               <a:t>−4,38%</a:t>
             </a:r>
           </a:p>
@@ -6989,13 +7100,13 @@
       </p:sp>
       <p:sp>
         <p:nvSpPr>
-          <p:cNvPr id="46" name="TextBox 45"/>
-          <p:cNvSpPr txBox="1"/>
-          <p:nvPr/>
-        </p:nvSpPr>
-        <p:spPr>
-          <a:xfrm>
-            <a:off x="2804641" y="6452932"/>
+          <p:cNvPr id="49" name="TextBox 48"/>
+          <p:cNvSpPr txBox="1"/>
+          <p:nvPr/>
+        </p:nvSpPr>
+        <p:spPr>
+          <a:xfrm>
+            <a:off x="2804641" y="6498292"/>
             <a:ext cx="645085" cy="143640"/>
           </a:xfrm>
           <a:prstGeom prst="rect">
@@ -7026,13 +7137,13 @@
       </p:sp>
       <p:sp>
         <p:nvSpPr>
-          <p:cNvPr id="47" name="TextBox 46"/>
-          <p:cNvSpPr txBox="1"/>
-          <p:nvPr/>
-        </p:nvSpPr>
-        <p:spPr>
-          <a:xfrm>
-            <a:off x="4513556" y="6452932"/>
+          <p:cNvPr id="50" name="TextBox 49"/>
+          <p:cNvSpPr txBox="1"/>
+          <p:nvPr/>
+        </p:nvSpPr>
+        <p:spPr>
+          <a:xfrm>
+            <a:off x="4513556" y="6498292"/>
             <a:ext cx="251473" cy="143640"/>
           </a:xfrm>
           <a:prstGeom prst="rect">
@@ -7063,7 +7174,7 @@
       </p:sp>
       <p:sp>
         <p:nvSpPr>
-          <p:cNvPr id="48" name="TextBox 47"/>
+          <p:cNvPr id="51" name="TextBox 50"/>
           <p:cNvSpPr txBox="1"/>
           <p:nvPr/>
         </p:nvSpPr>

--- a/AutomaTivio/saida/2026-08/pptx/Tivio ALT Light - Relatório de Gestão - Agosto 2026.pptx
+++ b/AutomaTivio/saida/2026-08/pptx/Tivio ALT Light - Relatório de Gestão - Agosto 2026.pptx
@@ -7579,7 +7579,7 @@
                 </a:solidFill>
                 <a:latin typeface="Versos"/>
               </a:rPr>
-              <a:t>Taxa de administração e gestão</a:t>
+              <a:t>Taxa global</a:t>
             </a:r>
           </a:p>
         </p:txBody>
@@ -8075,7 +8075,7 @@
         <p:spPr>
           <a:xfrm>
             <a:off x="400680" y="6471360"/>
-            <a:ext cx="6758640" cy="600901"/>
+            <a:ext cx="6758640" cy="593814"/>
           </a:xfrm>
           <a:prstGeom prst="rect">
             <a:avLst/>
@@ -8088,11 +8088,11 @@
           <a:p>
             <a:pPr algn="just">
               <a:lnSpc>
-                <a:spcPts val="791"/>
-              </a:lnSpc>
-            </a:pPr>
-            <a:r>
-              <a:rPr sz="648" b="0" i="0">
+                <a:spcPts val="780"/>
+              </a:lnSpc>
+            </a:pPr>
+            <a:r>
+              <a:rPr sz="639" b="0" i="0">
                 <a:solidFill>
                   <a:srgbClr val="E9E9E9"/>
                 </a:solidFill>
@@ -8111,8 +8111,8 @@
         </p:nvSpPr>
         <p:spPr>
           <a:xfrm>
-            <a:off x="400680" y="7103328"/>
-            <a:ext cx="6758640" cy="902475"/>
+            <a:off x="400680" y="7094351"/>
+            <a:ext cx="6758640" cy="891135"/>
           </a:xfrm>
           <a:prstGeom prst="rect">
             <a:avLst/>
@@ -8125,11 +8125,11 @@
           <a:p>
             <a:pPr algn="just">
               <a:lnSpc>
-                <a:spcPts val="791"/>
-              </a:lnSpc>
-            </a:pPr>
-            <a:r>
-              <a:rPr sz="648" b="0" i="0">
+                <a:spcPts val="780"/>
+              </a:lnSpc>
+            </a:pPr>
+            <a:r>
+              <a:rPr sz="639" b="0" i="0">
                 <a:solidFill>
                   <a:srgbClr val="E9E9E9"/>
                 </a:solidFill>
@@ -8148,8 +8148,8 @@
         </p:nvSpPr>
         <p:spPr>
           <a:xfrm>
-            <a:off x="400680" y="8036870"/>
-            <a:ext cx="6758640" cy="500377"/>
+            <a:off x="400680" y="8014663"/>
+            <a:ext cx="6758640" cy="494707"/>
           </a:xfrm>
           <a:prstGeom prst="rect">
             <a:avLst/>
@@ -8162,11 +8162,11 @@
           <a:p>
             <a:pPr algn="just">
               <a:lnSpc>
-                <a:spcPts val="791"/>
-              </a:lnSpc>
-            </a:pPr>
-            <a:r>
-              <a:rPr sz="648" b="0" i="0">
+                <a:spcPts val="780"/>
+              </a:lnSpc>
+            </a:pPr>
+            <a:r>
+              <a:rPr sz="639" b="0" i="0">
                 <a:solidFill>
                   <a:srgbClr val="E9E9E9"/>
                 </a:solidFill>
@@ -8185,8 +8185,8 @@
         </p:nvSpPr>
         <p:spPr>
           <a:xfrm>
-            <a:off x="400680" y="8568315"/>
-            <a:ext cx="6758640" cy="399853"/>
+            <a:off x="400680" y="8538547"/>
+            <a:ext cx="6758640" cy="395600"/>
           </a:xfrm>
           <a:prstGeom prst="rect">
             <a:avLst/>
@@ -8199,11 +8199,11 @@
           <a:p>
             <a:pPr algn="just">
               <a:lnSpc>
-                <a:spcPts val="791"/>
-              </a:lnSpc>
-            </a:pPr>
-            <a:r>
-              <a:rPr sz="648" b="0" i="0">
+                <a:spcPts val="780"/>
+              </a:lnSpc>
+            </a:pPr>
+            <a:r>
+              <a:rPr sz="639" b="0" i="0">
                 <a:solidFill>
                   <a:srgbClr val="E9E9E9"/>
                 </a:solidFill>

--- a/AutomaTivio/saida/2026-08/pptx/Tivio ALT Light - Relatório de Gestão - Agosto 2026.pptx
+++ b/AutomaTivio/saida/2026-08/pptx/Tivio ALT Light - Relatório de Gestão - Agosto 2026.pptx
@@ -3149,7 +3149,7 @@
               <a:t>TIVIO ALT LIGHT XP PREV </a:t>
             </a:r>
             <a:r>
-              <a:rPr sz="833" b="0" i="0">
+              <a:rPr sz="903" b="0" i="0">
                 <a:solidFill>
                   <a:srgbClr val="FFFFFF"/>
                 </a:solidFill>

--- a/AutomaTivio/saida/2026-08/pptx/Tivio ALT Light - Relatório de Gestão - Agosto 2026.pptx
+++ b/AutomaTivio/saida/2026-08/pptx/Tivio ALT Light - Relatório de Gestão - Agosto 2026.pptx
@@ -7653,7 +7653,7 @@
                 </a:solidFill>
                 <a:latin typeface="Versos"/>
               </a:rPr>
-              <a:t>Patrimônio líquido</a:t>
+              <a:t>Taxa de performance</a:t>
             </a:r>
           </a:p>
         </p:txBody>
@@ -7690,7 +7690,7 @@
                 </a:solidFill>
                 <a:latin typeface="Versos"/>
               </a:rPr>
-              <a:t>R$ 26.829.258,71</a:t>
+              <a:t>15% do retorno que exceder CDI+0,65%</a:t>
             </a:r>
           </a:p>
         </p:txBody>
@@ -7727,7 +7727,7 @@
                 </a:solidFill>
                 <a:latin typeface="Versos"/>
               </a:rPr>
-              <a:t>Taxa de performance</a:t>
+              <a:t>Informações Operacionais</a:t>
             </a:r>
           </a:p>
         </p:txBody>
@@ -7741,6 +7741,155 @@
         <p:spPr>
           <a:xfrm>
             <a:off x="3878280" y="1883857"/>
+            <a:ext cx="3281040" cy="1366351"/>
+          </a:xfrm>
+          <a:prstGeom prst="rect">
+            <a:avLst/>
+          </a:prstGeom>
+          <a:noFill/>
+        </p:spPr>
+        <p:txBody>
+          <a:bodyPr wrap="square" lIns="0" rIns="0" tIns="0" bIns="0" anchor="t"/>
+          <a:lstStyle/>
+          <a:p>
+            <a:pPr algn="l">
+              <a:lnSpc>
+                <a:spcPts val="1333"/>
+              </a:lnSpc>
+            </a:pPr>
+            <a:r>
+              <a:rPr sz="1190" b="0" i="0">
+                <a:solidFill>
+                  <a:srgbClr val="222222"/>
+                </a:solidFill>
+                <a:latin typeface="Versos"/>
+              </a:rPr>
+              <a:t>Aplicação:</a:t>
+            </a:r>
+          </a:p>
+          <a:p>
+            <a:pPr algn="l">
+              <a:lnSpc>
+                <a:spcPts val="1333"/>
+              </a:lnSpc>
+            </a:pPr>
+            <a:r>
+              <a:rPr sz="1190" b="1" i="0">
+                <a:solidFill>
+                  <a:srgbClr val="222222"/>
+                </a:solidFill>
+                <a:latin typeface="Versos"/>
+              </a:rPr>
+              <a:t>D+1</a:t>
+            </a:r>
+          </a:p>
+          <a:p>
+            <a:pPr algn="l">
+              <a:lnSpc>
+                <a:spcPts val="1333"/>
+              </a:lnSpc>
+            </a:pPr>
+            <a:r>
+              <a:rPr sz="1190" b="0" i="0">
+                <a:solidFill>
+                  <a:srgbClr val="222222"/>
+                </a:solidFill>
+                <a:latin typeface="Versos"/>
+              </a:rPr>
+              <a:t>Resgate:</a:t>
+            </a:r>
+          </a:p>
+          <a:p>
+            <a:pPr algn="l">
+              <a:lnSpc>
+                <a:spcPts val="1333"/>
+              </a:lnSpc>
+            </a:pPr>
+            <a:r>
+              <a:rPr sz="1190" b="1" i="0">
+                <a:solidFill>
+                  <a:srgbClr val="222222"/>
+                </a:solidFill>
+                <a:latin typeface="Versos"/>
+              </a:rPr>
+              <a:t>D+50</a:t>
+            </a:r>
+          </a:p>
+          <a:p>
+            <a:pPr algn="l">
+              <a:lnSpc>
+                <a:spcPts val="1333"/>
+              </a:lnSpc>
+            </a:pPr>
+            <a:r>
+              <a:rPr sz="1190" b="0" i="0">
+                <a:solidFill>
+                  <a:srgbClr val="222222"/>
+                </a:solidFill>
+                <a:latin typeface="Versos"/>
+              </a:rPr>
+              <a:t>Aplicação mínima inicial:</a:t>
+            </a:r>
+          </a:p>
+          <a:p>
+            <a:pPr algn="l">
+              <a:lnSpc>
+                <a:spcPts val="1333"/>
+              </a:lnSpc>
+            </a:pPr>
+            <a:r>
+              <a:rPr sz="1190" b="1" i="0">
+                <a:solidFill>
+                  <a:srgbClr val="222222"/>
+                </a:solidFill>
+                <a:latin typeface="Versos"/>
+              </a:rPr>
+              <a:t>R$ 1.000,00</a:t>
+            </a:r>
+          </a:p>
+          <a:p>
+            <a:pPr algn="l">
+              <a:lnSpc>
+                <a:spcPts val="1333"/>
+              </a:lnSpc>
+            </a:pPr>
+            <a:r>
+              <a:rPr sz="1190" b="0" i="0">
+                <a:solidFill>
+                  <a:srgbClr val="222222"/>
+                </a:solidFill>
+                <a:latin typeface="Versos"/>
+              </a:rPr>
+              <a:t>Movimentação mínima:</a:t>
+            </a:r>
+          </a:p>
+          <a:p>
+            <a:pPr algn="l">
+              <a:lnSpc>
+                <a:spcPts val="1333"/>
+              </a:lnSpc>
+            </a:pPr>
+            <a:r>
+              <a:rPr sz="1190" b="1" i="0">
+                <a:solidFill>
+                  <a:srgbClr val="222222"/>
+                </a:solidFill>
+                <a:latin typeface="Versos"/>
+              </a:rPr>
+              <a:t>R$ 1.000,00</a:t>
+            </a:r>
+          </a:p>
+        </p:txBody>
+      </p:sp>
+      <p:sp>
+        <p:nvSpPr>
+          <p:cNvPr id="17" name="TextBox 16"/>
+          <p:cNvSpPr txBox="1"/>
+          <p:nvPr/>
+        </p:nvSpPr>
+        <p:spPr>
+          <a:xfrm>
+            <a:off x="3878280" y="3767596"/>
             <a:ext cx="3412281" cy="181440"/>
           </a:xfrm>
           <a:prstGeom prst="rect">
@@ -7754,6 +7903,43 @@
           <a:p>
             <a:pPr algn="l">
               <a:lnSpc>
+                <a:spcPts val="1369"/>
+              </a:lnSpc>
+            </a:pPr>
+            <a:r>
+              <a:rPr sz="1190" b="1" i="0">
+                <a:solidFill>
+                  <a:srgbClr val="111111"/>
+                </a:solidFill>
+                <a:latin typeface="Versos"/>
+              </a:rPr>
+              <a:t>Patrimônio líquido</a:t>
+            </a:r>
+          </a:p>
+        </p:txBody>
+      </p:sp>
+      <p:sp>
+        <p:nvSpPr>
+          <p:cNvPr id="18" name="TextBox 17"/>
+          <p:cNvSpPr txBox="1"/>
+          <p:nvPr/>
+        </p:nvSpPr>
+        <p:spPr>
+          <a:xfrm>
+            <a:off x="3878280" y="3956596"/>
+            <a:ext cx="3412281" cy="181440"/>
+          </a:xfrm>
+          <a:prstGeom prst="rect">
+            <a:avLst/>
+          </a:prstGeom>
+          <a:noFill/>
+        </p:spPr>
+        <p:txBody>
+          <a:bodyPr wrap="none" lIns="0" rIns="0" tIns="0" bIns="0" anchor="t"/>
+          <a:lstStyle/>
+          <a:p>
+            <a:pPr algn="l">
+              <a:lnSpc>
                 <a:spcPts val="1333"/>
               </a:lnSpc>
             </a:pPr>
@@ -7764,193 +7950,7 @@
                 </a:solidFill>
                 <a:latin typeface="Versos"/>
               </a:rPr>
-              <a:t>15% do retorno que exceder CDI+0,65%</a:t>
-            </a:r>
-          </a:p>
-        </p:txBody>
-      </p:sp>
-      <p:sp>
-        <p:nvSpPr>
-          <p:cNvPr id="17" name="TextBox 16"/>
-          <p:cNvSpPr txBox="1"/>
-          <p:nvPr/>
-        </p:nvSpPr>
-        <p:spPr>
-          <a:xfrm>
-            <a:off x="3878280" y="2385770"/>
-            <a:ext cx="3412281" cy="181440"/>
-          </a:xfrm>
-          <a:prstGeom prst="rect">
-            <a:avLst/>
-          </a:prstGeom>
-          <a:noFill/>
-        </p:spPr>
-        <p:txBody>
-          <a:bodyPr wrap="none" lIns="0" rIns="0" tIns="0" bIns="0" anchor="t"/>
-          <a:lstStyle/>
-          <a:p>
-            <a:pPr algn="l">
-              <a:lnSpc>
-                <a:spcPts val="1369"/>
-              </a:lnSpc>
-            </a:pPr>
-            <a:r>
-              <a:rPr sz="1190" b="1" i="0">
-                <a:solidFill>
-                  <a:srgbClr val="111111"/>
-                </a:solidFill>
-                <a:latin typeface="Versos"/>
-              </a:rPr>
-              <a:t>Informações Operacionais</a:t>
-            </a:r>
-          </a:p>
-        </p:txBody>
-      </p:sp>
-      <p:sp>
-        <p:nvSpPr>
-          <p:cNvPr id="18" name="TextBox 17"/>
-          <p:cNvSpPr txBox="1"/>
-          <p:nvPr/>
-        </p:nvSpPr>
-        <p:spPr>
-          <a:xfrm>
-            <a:off x="3878280" y="2574770"/>
-            <a:ext cx="3281040" cy="1366351"/>
-          </a:xfrm>
-          <a:prstGeom prst="rect">
-            <a:avLst/>
-          </a:prstGeom>
-          <a:noFill/>
-        </p:spPr>
-        <p:txBody>
-          <a:bodyPr wrap="square" lIns="0" rIns="0" tIns="0" bIns="0" anchor="t"/>
-          <a:lstStyle/>
-          <a:p>
-            <a:pPr algn="l">
-              <a:lnSpc>
-                <a:spcPts val="1333"/>
-              </a:lnSpc>
-            </a:pPr>
-            <a:r>
-              <a:rPr sz="1190" b="0" i="0">
-                <a:solidFill>
-                  <a:srgbClr val="222222"/>
-                </a:solidFill>
-                <a:latin typeface="Versos"/>
-              </a:rPr>
-              <a:t>Aplicação:</a:t>
-            </a:r>
-          </a:p>
-          <a:p>
-            <a:pPr algn="l">
-              <a:lnSpc>
-                <a:spcPts val="1333"/>
-              </a:lnSpc>
-            </a:pPr>
-            <a:r>
-              <a:rPr sz="1190" b="1" i="0">
-                <a:solidFill>
-                  <a:srgbClr val="222222"/>
-                </a:solidFill>
-                <a:latin typeface="Versos"/>
-              </a:rPr>
-              <a:t>D+1</a:t>
-            </a:r>
-          </a:p>
-          <a:p>
-            <a:pPr algn="l">
-              <a:lnSpc>
-                <a:spcPts val="1333"/>
-              </a:lnSpc>
-            </a:pPr>
-            <a:r>
-              <a:rPr sz="1190" b="0" i="0">
-                <a:solidFill>
-                  <a:srgbClr val="222222"/>
-                </a:solidFill>
-                <a:latin typeface="Versos"/>
-              </a:rPr>
-              <a:t>Resgate:</a:t>
-            </a:r>
-          </a:p>
-          <a:p>
-            <a:pPr algn="l">
-              <a:lnSpc>
-                <a:spcPts val="1333"/>
-              </a:lnSpc>
-            </a:pPr>
-            <a:r>
-              <a:rPr sz="1190" b="1" i="0">
-                <a:solidFill>
-                  <a:srgbClr val="222222"/>
-                </a:solidFill>
-                <a:latin typeface="Versos"/>
-              </a:rPr>
-              <a:t>D+50</a:t>
-            </a:r>
-          </a:p>
-          <a:p>
-            <a:pPr algn="l">
-              <a:lnSpc>
-                <a:spcPts val="1333"/>
-              </a:lnSpc>
-            </a:pPr>
-            <a:r>
-              <a:rPr sz="1190" b="0" i="0">
-                <a:solidFill>
-                  <a:srgbClr val="222222"/>
-                </a:solidFill>
-                <a:latin typeface="Versos"/>
-              </a:rPr>
-              <a:t>Aplicação mínima inicial:</a:t>
-            </a:r>
-          </a:p>
-          <a:p>
-            <a:pPr algn="l">
-              <a:lnSpc>
-                <a:spcPts val="1333"/>
-              </a:lnSpc>
-            </a:pPr>
-            <a:r>
-              <a:rPr sz="1190" b="1" i="0">
-                <a:solidFill>
-                  <a:srgbClr val="222222"/>
-                </a:solidFill>
-                <a:latin typeface="Versos"/>
-              </a:rPr>
-              <a:t>R$ 1.000,00</a:t>
-            </a:r>
-          </a:p>
-          <a:p>
-            <a:pPr algn="l">
-              <a:lnSpc>
-                <a:spcPts val="1333"/>
-              </a:lnSpc>
-            </a:pPr>
-            <a:r>
-              <a:rPr sz="1190" b="0" i="0">
-                <a:solidFill>
-                  <a:srgbClr val="222222"/>
-                </a:solidFill>
-                <a:latin typeface="Versos"/>
-              </a:rPr>
-              <a:t>Movimentação mínima:</a:t>
-            </a:r>
-          </a:p>
-          <a:p>
-            <a:pPr algn="l">
-              <a:lnSpc>
-                <a:spcPts val="1333"/>
-              </a:lnSpc>
-            </a:pPr>
-            <a:r>
-              <a:rPr sz="1190" b="1" i="0">
-                <a:solidFill>
-                  <a:srgbClr val="222222"/>
-                </a:solidFill>
-                <a:latin typeface="Versos"/>
-              </a:rPr>
-              <a:t>R$ 1.000,00</a:t>
+              <a:t>R$ 26.829.258,71</a:t>
             </a:r>
           </a:p>
         </p:txBody>

--- a/AutomaTivio/saida/2026-08/pptx/Tivio ALT Light - Relatório de Gestão - Agosto 2026.pptx
+++ b/AutomaTivio/saida/2026-08/pptx/Tivio ALT Light - Relatório de Gestão - Agosto 2026.pptx
@@ -8403,7 +8403,7 @@
         <p:spPr>
           <a:xfrm>
             <a:off x="4528440" y="10020071"/>
-            <a:ext cx="500613" cy="98280"/>
+            <a:ext cx="527886" cy="98280"/>
           </a:xfrm>
           <a:prstGeom prst="rect">
             <a:avLst/>
@@ -8426,7 +8426,7 @@
                 </a:solidFill>
                 <a:latin typeface="Versos"/>
               </a:rPr>
-              <a:t>RATING S&amp;P:</a:t>
+              <a:t>Rating S&amp;P</a:t>
             </a:r>
           </a:p>
         </p:txBody>
@@ -8440,7 +8440,7 @@
         <p:spPr>
           <a:xfrm>
             <a:off x="4528440" y="10110791"/>
-            <a:ext cx="500613" cy="166320"/>
+            <a:ext cx="527886" cy="166320"/>
           </a:xfrm>
           <a:prstGeom prst="rect">
             <a:avLst/>
@@ -8463,7 +8463,7 @@
                 </a:solidFill>
                 <a:latin typeface="Versos"/>
               </a:rPr>
-              <a:t>AMP-1</a:t>
+              <a:t>brAMP1</a:t>
             </a:r>
           </a:p>
         </p:txBody>

--- a/AutomaTivio/saida/2026-08/pptx/Tivio ALT Light - Relatório de Gestão - Agosto 2026.pptx
+++ b/AutomaTivio/saida/2026-08/pptx/Tivio ALT Light - Relatório de Gestão - Agosto 2026.pptx
@@ -8061,7 +8061,7 @@
                 </a:solidFill>
                 <a:latin typeface="Versos"/>
               </a:rPr>
-              <a:t>Disclaimer</a:t>
+              <a:t>MATERIAL TÉCNICO</a:t>
             </a:r>
           </a:p>
         </p:txBody>
@@ -8075,7 +8075,7 @@
         <p:spPr>
           <a:xfrm>
             <a:off x="400680" y="6471360"/>
-            <a:ext cx="6758640" cy="593814"/>
+            <a:ext cx="6758640" cy="291178"/>
           </a:xfrm>
           <a:prstGeom prst="rect">
             <a:avLst/>
@@ -8088,17 +8088,17 @@
           <a:p>
             <a:pPr algn="just">
               <a:lnSpc>
-                <a:spcPts val="780"/>
-              </a:lnSpc>
-            </a:pPr>
-            <a:r>
-              <a:rPr sz="639" b="0" i="0">
+                <a:spcPts val="1162"/>
+              </a:lnSpc>
+            </a:pPr>
+            <a:r>
+              <a:rPr sz="952" b="0" i="0">
                 <a:solidFill>
                   <a:srgbClr val="E9E9E9"/>
                 </a:solidFill>
                 <a:latin typeface="Versos"/>
               </a:rPr>
-              <a:t>Este material foi elaborado pela Tivio Capital Distribuidora de Títulos e Valores Mobiliários S.A. (“TIVIO CAPITAL”). Este material é destinado aos seus receptores, fornecido unicamente para fins comerciais, não constituindo compromisso, indicação ou recomendação para iniciar ou encerrar qualquer transação. Este conteúdo não deve ser reproduzido no todo ou em parte, redistribuído ou transmitido para qualquer outra pessoa sem o consentimento prévio da TIVIO CAPITAL. Este documento não é, e não deve ser interpretado como, uma oferta de venda ou solicitação de uma oferta de compra de qualquer título ou valor mobiliário. A TIVIO CAPITAL, seus acionistas e demais empresas coligadas se eximem de qualquer responsabilidade por quaisquer prejuízos, diretos ou indiretos, que venham a decorrer da utilização deste material, de seu conteúdo e da realização de operações com base neste material.</a:t>
+              <a:t>Este material foi elaborado pela Tivio Capital Distribuidora de Títulos e Valores Mobiliários S.A. e possui caráter meramente informativo. Não constitui oferta, recomendação ou aconselhamento de investimento.</a:t>
             </a:r>
           </a:p>
         </p:txBody>
@@ -8111,8 +8111,8 @@
         </p:nvSpPr>
         <p:spPr>
           <a:xfrm>
-            <a:off x="400680" y="7094351"/>
-            <a:ext cx="6758640" cy="891135"/>
+            <a:off x="400680" y="6808725"/>
+            <a:ext cx="6758640" cy="438716"/>
           </a:xfrm>
           <a:prstGeom prst="rect">
             <a:avLst/>
@@ -8125,17 +8125,17 @@
           <a:p>
             <a:pPr algn="just">
               <a:lnSpc>
-                <a:spcPts val="780"/>
-              </a:lnSpc>
-            </a:pPr>
-            <a:r>
-              <a:rPr sz="639" b="0" i="0">
+                <a:spcPts val="1162"/>
+              </a:lnSpc>
+            </a:pPr>
+            <a:r>
+              <a:rPr sz="952" b="0" i="0">
                 <a:solidFill>
                   <a:srgbClr val="E9E9E9"/>
                 </a:solidFill>
                 <a:latin typeface="Versos"/>
               </a:rPr>
-              <a:t>Consulte o documento de tributação para Fundos de Investimento para mais informações sobre a tributação aplicável, inclusive a regra aplicável em eventual desenquadramento, este documento está disponível em https://tivio.com/documentos/. A descrição acima não pode ser considerada como objetivo do fundo. Todas as informações legais podem ser observadas no regulamento do fundo, disponíveis no site https://tivio.com/fundos/. Os indicadores aqui apresentados devem ser utilizados como referência econômica e não parâmetro objetivo do fundo. Principais Fatores de Risco: (i) Crédito: risco de os emissores dos ativos financeiros e/ou das contrapartes não cumprirem suas obrigações de pagamento e/ou de liquidação das operações contratadas; (ii) Liquidez: risco de redução ou inexistência de demanda pelos ativos financeiros nos respectivos mercados em que são negociados; (iii) Mercado: Risco de oscilações decorrentes das flutuações de preços e cotações de mercado; (iv) Derivativos: pode não resultar nos efeitos desejados, devido a fatores como: descolamento entre o preço do derivativo e seu ativo objeto; alterações nas condições de negociação ou liquidação devido à interferência de órgãos reguladores ou dos mercados organizados onde são negociados; (v) Tratamento Tributário de Longo Prazo: O tratamento aplicável ao investidor depende da manutenção da carteira de ativos com prazo médio superior a 365 dias. Não há garantia de que o fundo terá o tratamento tributário de longo prazo.</a:t>
+              <a:t>Antes de investir, leia a lâmina de informações básicas, se aplicável, o regulamento, o formulário de informações complementares, seus anexos e apêndices. Esses documentos e informações sobre tributação estão disponíveis em tivio.com/fundos/ e tivio.com/documentos/.</a:t>
             </a:r>
           </a:p>
         </p:txBody>
@@ -8148,8 +8148,8 @@
         </p:nvSpPr>
         <p:spPr>
           <a:xfrm>
-            <a:off x="400680" y="8014663"/>
-            <a:ext cx="6758640" cy="494707"/>
+            <a:off x="400680" y="7293628"/>
+            <a:ext cx="6758640" cy="291178"/>
           </a:xfrm>
           <a:prstGeom prst="rect">
             <a:avLst/>
@@ -8162,17 +8162,17 @@
           <a:p>
             <a:pPr algn="just">
               <a:lnSpc>
-                <a:spcPts val="780"/>
-              </a:lnSpc>
-            </a:pPr>
-            <a:r>
-              <a:rPr sz="639" b="0" i="0">
+                <a:spcPts val="1162"/>
+              </a:lnSpc>
+            </a:pPr>
+            <a:r>
+              <a:rPr sz="952" b="0" i="0">
                 <a:solidFill>
                   <a:srgbClr val="E9E9E9"/>
                 </a:solidFill>
                 <a:latin typeface="Versos"/>
               </a:rPr>
-              <a:t>Leia a lâmina de informações essenciais, se houver, e o regulamento antes de investir. Estes documentos podem ser encontrados no site https://tivio.com/fundos/. Leia previamente as condições de cada produto antes de investir. Os investimentos apresentados podem não ser adequados aos seus objetivos, situação financeira ou necessidades individuais. A rentabilidade obtida no passado não representa garantia de resultados futuros. A rentabilidade divulgada não é líquida de impostos. “Os ativos financeiros integrantes nesta carteira podem não possuir liquidez imediata, podendo seus prazos e/ou rentabilidade variar de acordo com o vencimento ou prazo de resgate de cada ativo, caso seja negociado antecipadamente.</a:t>
+              <a:t>Os investimentos envolvem riscos. Consulte os documentos do fundo para conhecer sua estratégia, público-alvo, condições e principais fatores de risco.</a:t>
             </a:r>
           </a:p>
         </p:txBody>
@@ -8185,8 +8185,8 @@
         </p:nvSpPr>
         <p:spPr>
           <a:xfrm>
-            <a:off x="400680" y="8538547"/>
-            <a:ext cx="6758640" cy="395600"/>
+            <a:off x="400680" y="7630993"/>
+            <a:ext cx="6758640" cy="291178"/>
           </a:xfrm>
           <a:prstGeom prst="rect">
             <a:avLst/>
@@ -8199,17 +8199,17 @@
           <a:p>
             <a:pPr algn="just">
               <a:lnSpc>
-                <a:spcPts val="780"/>
-              </a:lnSpc>
-            </a:pPr>
-            <a:r>
-              <a:rPr sz="639" b="0" i="0">
+                <a:spcPts val="1162"/>
+              </a:lnSpc>
+            </a:pPr>
+            <a:r>
+              <a:rPr sz="952" b="0" i="0">
                 <a:solidFill>
                   <a:srgbClr val="E9E9E9"/>
                 </a:solidFill>
                 <a:latin typeface="Versos"/>
               </a:rPr>
-              <a:t>Para avaliação da performance de fundo(s) de investimento(s), é recomendável uma análise de, no mínimo, 12 (doze) meses. Fundos de investimento não contam com garantia do administrador, do gestor, de qualquer mecanismo de seguro ou do Fundo Garantidor de Crédito (FGC). O preenchimento do formulário API – Análise de Perfil do Investidor ou Suitability é essencial para garantir a adequação do perfil do cliente ao produto de investimento escolhido. Os indicadores aqui apresentados devem ser utilizados como referência econômica e não parâmetro objetivo do fundo. Material de Divulgação.</a:t>
+              <a:t>Rentabilidade obtida no passado não representa garantia de resultados futuros. A rentabilidade divulgada não é líquida de impostos.</a:t>
             </a:r>
           </a:p>
         </p:txBody>
@@ -8217,6 +8217,80 @@
       <p:sp>
         <p:nvSpPr>
           <p:cNvPr id="26" name="TextBox 25"/>
+          <p:cNvSpPr txBox="1"/>
+          <p:nvPr/>
+        </p:nvSpPr>
+        <p:spPr>
+          <a:xfrm>
+            <a:off x="400680" y="7968358"/>
+            <a:ext cx="6758640" cy="291178"/>
+          </a:xfrm>
+          <a:prstGeom prst="rect">
+            <a:avLst/>
+          </a:prstGeom>
+          <a:noFill/>
+        </p:spPr>
+        <p:txBody>
+          <a:bodyPr wrap="square" lIns="0" rIns="0" tIns="0" bIns="0" anchor="t"/>
+          <a:lstStyle/>
+          <a:p>
+            <a:pPr algn="just">
+              <a:lnSpc>
+                <a:spcPts val="1162"/>
+              </a:lnSpc>
+            </a:pPr>
+            <a:r>
+              <a:rPr sz="952" b="0" i="0">
+                <a:solidFill>
+                  <a:srgbClr val="E9E9E9"/>
+                </a:solidFill>
+                <a:latin typeface="Versos"/>
+              </a:rPr>
+              <a:t>Os investimentos em fundos não são garantidos pelo administrador, pelo gestor, por qualquer mecanismo de seguro ou pelo Fundo Garantidor de Crédito – FGC.</a:t>
+            </a:r>
+          </a:p>
+        </p:txBody>
+      </p:sp>
+      <p:sp>
+        <p:nvSpPr>
+          <p:cNvPr id="27" name="TextBox 26"/>
+          <p:cNvSpPr txBox="1"/>
+          <p:nvPr/>
+        </p:nvSpPr>
+        <p:spPr>
+          <a:xfrm>
+            <a:off x="400680" y="8305723"/>
+            <a:ext cx="6758640" cy="291178"/>
+          </a:xfrm>
+          <a:prstGeom prst="rect">
+            <a:avLst/>
+          </a:prstGeom>
+          <a:noFill/>
+        </p:spPr>
+        <p:txBody>
+          <a:bodyPr wrap="square" lIns="0" rIns="0" tIns="0" bIns="0" anchor="t"/>
+          <a:lstStyle/>
+          <a:p>
+            <a:pPr algn="just">
+              <a:lnSpc>
+                <a:spcPts val="1162"/>
+              </a:lnSpc>
+            </a:pPr>
+            <a:r>
+              <a:rPr sz="952" b="0" i="0">
+                <a:solidFill>
+                  <a:srgbClr val="E9E9E9"/>
+                </a:solidFill>
+                <a:latin typeface="Versos"/>
+              </a:rPr>
+              <a:t>A Tivio Capital Distribuidora de Títulos e Valores Mobiliários S.A. integra o conglomerado prudencial liderado pelo Banco Bradesco S.A.</a:t>
+            </a:r>
+          </a:p>
+        </p:txBody>
+      </p:sp>
+      <p:sp>
+        <p:nvSpPr>
+          <p:cNvPr id="28" name="TextBox 27"/>
           <p:cNvSpPr txBox="1"/>
           <p:nvPr/>
         </p:nvSpPr>
@@ -8269,7 +8343,7 @@
       </p:sp>
       <p:sp>
         <p:nvSpPr>
-          <p:cNvPr id="27" name="TextBox 26"/>
+          <p:cNvPr id="29" name="TextBox 28"/>
           <p:cNvSpPr txBox="1"/>
           <p:nvPr/>
         </p:nvSpPr>
@@ -8322,7 +8396,7 @@
       </p:sp>
       <p:sp>
         <p:nvSpPr>
-          <p:cNvPr id="28" name="TextBox 27"/>
+          <p:cNvPr id="30" name="TextBox 29"/>
           <p:cNvSpPr txBox="1"/>
           <p:nvPr/>
         </p:nvSpPr>
@@ -8359,7 +8433,7 @@
       </p:sp>
       <p:sp>
         <p:nvSpPr>
-          <p:cNvPr id="29" name="TextBox 28"/>
+          <p:cNvPr id="31" name="TextBox 30"/>
           <p:cNvSpPr txBox="1"/>
           <p:nvPr/>
         </p:nvSpPr>
@@ -8396,7 +8470,7 @@
       </p:sp>
       <p:sp>
         <p:nvSpPr>
-          <p:cNvPr id="30" name="TextBox 29"/>
+          <p:cNvPr id="32" name="TextBox 31"/>
           <p:cNvSpPr txBox="1"/>
           <p:nvPr/>
         </p:nvSpPr>
@@ -8433,7 +8507,7 @@
       </p:sp>
       <p:sp>
         <p:nvSpPr>
-          <p:cNvPr id="31" name="TextBox 30"/>
+          <p:cNvPr id="33" name="TextBox 32"/>
           <p:cNvSpPr txBox="1"/>
           <p:nvPr/>
         </p:nvSpPr>

--- a/AutomaTivio/saida/2026-08/pptx/Tivio ALT Light - Relatório de Gestão - Agosto 2026.pptx
+++ b/AutomaTivio/saida/2026-08/pptx/Tivio ALT Light - Relatório de Gestão - Agosto 2026.pptx
@@ -8296,8 +8296,8 @@
         </p:nvSpPr>
         <p:spPr>
           <a:xfrm>
-            <a:off x="400680" y="9086056"/>
-            <a:ext cx="859477" cy="200221"/>
+            <a:off x="400680" y="8987540"/>
+            <a:ext cx="1273269" cy="294840"/>
           </a:xfrm>
           <a:prstGeom prst="rect">
             <a:avLst/>
@@ -8310,11 +8310,11 @@
           <a:p>
             <a:pPr algn="l">
               <a:lnSpc>
-                <a:spcPts val="803"/>
-              </a:lnSpc>
-            </a:pPr>
-            <a:r>
-              <a:rPr sz="642" b="0" i="0">
+                <a:spcPts val="1190"/>
+              </a:lnSpc>
+            </a:pPr>
+            <a:r>
+              <a:rPr sz="952" b="0" i="0">
                 <a:solidFill>
                   <a:srgbClr val="E9E9E9"/>
                 </a:solidFill>
@@ -8326,11 +8326,11 @@
           <a:p>
             <a:pPr algn="l">
               <a:lnSpc>
-                <a:spcPts val="803"/>
-              </a:lnSpc>
-            </a:pPr>
-            <a:r>
-              <a:rPr sz="642" b="0" i="0">
+                <a:spcPts val="1190"/>
+              </a:lnSpc>
+            </a:pPr>
+            <a:r>
+              <a:rPr sz="952" b="0" i="0">
                 <a:solidFill>
                   <a:srgbClr val="E9E9E9"/>
                 </a:solidFill>
@@ -8349,8 +8349,8 @@
         </p:nvSpPr>
         <p:spPr>
           <a:xfrm>
-            <a:off x="1381117" y="9086056"/>
-            <a:ext cx="3049987" cy="200221"/>
+            <a:off x="1794909" y="8987540"/>
+            <a:ext cx="4518399" cy="294840"/>
           </a:xfrm>
           <a:prstGeom prst="rect">
             <a:avLst/>
@@ -8363,11 +8363,11 @@
           <a:p>
             <a:pPr algn="l">
               <a:lnSpc>
-                <a:spcPts val="803"/>
-              </a:lnSpc>
-            </a:pPr>
-            <a:r>
-              <a:rPr sz="642" b="0" i="0">
+                <a:spcPts val="1190"/>
+              </a:lnSpc>
+            </a:pPr>
+            <a:r>
+              <a:rPr sz="952" b="0" i="0">
                 <a:solidFill>
                   <a:srgbClr val="E9E9E9"/>
                 </a:solidFill>
@@ -8379,11 +8379,11 @@
           <a:p>
             <a:pPr algn="l">
               <a:lnSpc>
-                <a:spcPts val="803"/>
-              </a:lnSpc>
-            </a:pPr>
-            <a:r>
-              <a:rPr sz="642" b="0" i="0">
+                <a:spcPts val="1190"/>
+              </a:lnSpc>
+            </a:pPr>
+            <a:r>
+              <a:rPr sz="952" b="0" i="0">
                 <a:solidFill>
                   <a:srgbClr val="E9E9E9"/>
                 </a:solidFill>

--- a/AutomaTivio/saida/2026-08/pptx/Tivio ALT Light - Relatório de Gestão - Agosto 2026.pptx
+++ b/AutomaTivio/saida/2026-08/pptx/Tivio ALT Light - Relatório de Gestão - Agosto 2026.pptx
@@ -4621,7 +4621,7 @@
         <p:spPr>
           <a:xfrm>
             <a:off x="498960" y="6231211"/>
-            <a:ext cx="2665845" cy="151200"/>
+            <a:ext cx="2665476" cy="151200"/>
           </a:xfrm>
           <a:prstGeom prst="rect">
             <a:avLst/>
@@ -4658,7 +4658,7 @@
         <p:spPr>
           <a:xfrm>
             <a:off x="498960" y="6387609"/>
-            <a:ext cx="2665845" cy="189000"/>
+            <a:ext cx="2665476" cy="189000"/>
           </a:xfrm>
           <a:prstGeom prst="rect">
             <a:avLst/>
@@ -4694,8 +4694,8 @@
         </p:nvSpPr>
         <p:spPr>
           <a:xfrm>
-            <a:off x="3258832" y="6089934"/>
-            <a:ext cx="1553107" cy="292477"/>
+            <a:off x="3258478" y="6089934"/>
+            <a:ext cx="1552871" cy="292477"/>
           </a:xfrm>
           <a:prstGeom prst="rect">
             <a:avLst/>
@@ -4747,8 +4747,8 @@
         </p:nvSpPr>
         <p:spPr>
           <a:xfrm>
-            <a:off x="3258832" y="6387609"/>
-            <a:ext cx="1615231" cy="189000"/>
+            <a:off x="3258478" y="6387609"/>
+            <a:ext cx="1614986" cy="189000"/>
           </a:xfrm>
           <a:prstGeom prst="rect">
             <a:avLst/>
@@ -4784,8 +4784,8 @@
         </p:nvSpPr>
         <p:spPr>
           <a:xfrm>
-            <a:off x="5008500" y="6089934"/>
-            <a:ext cx="1400490" cy="292477"/>
+            <a:off x="5008027" y="6089934"/>
+            <a:ext cx="1400962" cy="292477"/>
           </a:xfrm>
           <a:prstGeom prst="rect">
             <a:avLst/>
@@ -4808,7 +4808,7 @@
                 </a:solidFill>
                 <a:latin typeface="Versos"/>
               </a:rPr>
-              <a:t>FIDCs</a:t>
+              <a:t>FIDC</a:t>
             </a:r>
           </a:p>
           <a:p>
@@ -4824,7 +4824,7 @@
                 </a:solidFill>
                 <a:latin typeface="Versos"/>
               </a:rPr>
-              <a:t>Cotas Sênior</a:t>
+              <a:t>Sênior</a:t>
             </a:r>
           </a:p>
         </p:txBody>
@@ -4837,8 +4837,8 @@
         </p:nvSpPr>
         <p:spPr>
           <a:xfrm>
-            <a:off x="5008500" y="6387609"/>
-            <a:ext cx="1456509" cy="189000"/>
+            <a:off x="5008027" y="6387609"/>
+            <a:ext cx="1457001" cy="189000"/>
           </a:xfrm>
           <a:prstGeom prst="rect">
             <a:avLst/>
@@ -4874,8 +4874,8 @@
         </p:nvSpPr>
         <p:spPr>
           <a:xfrm>
-            <a:off x="6559363" y="6086863"/>
-            <a:ext cx="569655" cy="105840"/>
+            <a:off x="6559481" y="6074223"/>
+            <a:ext cx="569532" cy="105840"/>
           </a:xfrm>
           <a:prstGeom prst="rect">
             <a:avLst/>
@@ -4911,31 +4911,31 @@
         </p:nvSpPr>
         <p:spPr>
           <a:xfrm>
-            <a:off x="6559363" y="6194947"/>
-            <a:ext cx="569655" cy="173880"/>
-          </a:xfrm>
-          <a:prstGeom prst="rect">
-            <a:avLst/>
-          </a:prstGeom>
-          <a:noFill/>
-        </p:spPr>
-        <p:txBody>
-          <a:bodyPr wrap="none" lIns="0" rIns="0" tIns="0" bIns="0" anchor="t"/>
-          <a:lstStyle/>
-          <a:p>
-            <a:pPr algn="l">
-              <a:lnSpc>
-                <a:spcPts val="1217"/>
-              </a:lnSpc>
-            </a:pPr>
-            <a:r>
-              <a:rPr sz="1107" b="1" i="0">
+            <a:off x="6559481" y="6182308"/>
+            <a:ext cx="569532" cy="173880"/>
+          </a:xfrm>
+          <a:prstGeom prst="rect">
+            <a:avLst/>
+          </a:prstGeom>
+          <a:noFill/>
+        </p:spPr>
+        <p:txBody>
+          <a:bodyPr wrap="none" lIns="0" rIns="0" tIns="0" bIns="0" anchor="t"/>
+          <a:lstStyle/>
+          <a:p>
+            <a:pPr algn="l">
+              <a:lnSpc>
+                <a:spcPts val="1211"/>
+              </a:lnSpc>
+            </a:pPr>
+            <a:r>
+              <a:rPr sz="1101" b="1" i="0">
                 <a:solidFill>
                   <a:srgbClr val="2B3744"/>
                 </a:solidFill>
                 <a:latin typeface="Versos"/>
               </a:rPr>
-              <a:t>7,8%</a:t>
+              <a:t>7,7%</a:t>
             </a:r>
           </a:p>
         </p:txBody>
@@ -4948,31 +4948,31 @@
         </p:nvSpPr>
         <p:spPr>
           <a:xfrm>
-            <a:off x="6559363" y="6511876"/>
-            <a:ext cx="569655" cy="105840"/>
-          </a:xfrm>
-          <a:prstGeom prst="rect">
-            <a:avLst/>
-          </a:prstGeom>
-          <a:noFill/>
-        </p:spPr>
-        <p:txBody>
-          <a:bodyPr wrap="none" lIns="0" rIns="0" tIns="0" bIns="0" anchor="t"/>
-          <a:lstStyle/>
-          <a:p>
-            <a:pPr algn="l">
-              <a:lnSpc>
-                <a:spcPts val="759"/>
-              </a:lnSpc>
-            </a:pPr>
-            <a:r>
-              <a:rPr sz="690" b="1" i="0">
+            <a:off x="6559481" y="6506797"/>
+            <a:ext cx="569532" cy="113400"/>
+          </a:xfrm>
+          <a:prstGeom prst="rect">
+            <a:avLst/>
+          </a:prstGeom>
+          <a:noFill/>
+        </p:spPr>
+        <p:txBody>
+          <a:bodyPr wrap="none" lIns="0" rIns="0" tIns="0" bIns="0" anchor="t"/>
+          <a:lstStyle/>
+          <a:p>
+            <a:pPr algn="l">
+              <a:lnSpc>
+                <a:spcPts val="798"/>
+              </a:lnSpc>
+            </a:pPr>
+            <a:r>
+              <a:rPr sz="726" b="1" i="0">
                 <a:solidFill>
                   <a:srgbClr val="FFFFFF"/>
                 </a:solidFill>
                 <a:latin typeface="Versos"/>
               </a:rPr>
-              <a:t>1,9%</a:t>
+              <a:t>2,0%</a:t>
             </a:r>
           </a:p>
         </p:txBody>
@@ -5078,7 +5078,7 @@
         <p:spPr>
           <a:xfrm>
             <a:off x="2845158" y="6743638"/>
-            <a:ext cx="1277762" cy="113400"/>
+            <a:ext cx="928746" cy="113400"/>
           </a:xfrm>
           <a:prstGeom prst="rect">
             <a:avLst/>
@@ -5101,7 +5101,7 @@
                 </a:solidFill>
                 <a:latin typeface="Versos"/>
               </a:rPr>
-              <a:t>FIDCs Cotas Sênior </a:t>
+              <a:t>FIDC Sênior </a:t>
             </a:r>
             <a:r>
               <a:rPr sz="744" b="1" i="0">
@@ -5123,8 +5123,8 @@
         </p:nvSpPr>
         <p:spPr>
           <a:xfrm>
-            <a:off x="4338376" y="6743638"/>
-            <a:ext cx="676657" cy="113400"/>
+            <a:off x="4002783" y="6743638"/>
+            <a:ext cx="668672" cy="113400"/>
           </a:xfrm>
           <a:prstGeom prst="rect">
             <a:avLst/>
@@ -5156,7 +5156,7 @@
                 </a:solidFill>
                 <a:latin typeface="Versos"/>
               </a:rPr>
-              <a:t>7,8%</a:t>
+              <a:t>7,7%</a:t>
             </a:r>
           </a:p>
         </p:txBody>
@@ -5169,8 +5169,8 @@
         </p:nvSpPr>
         <p:spPr>
           <a:xfrm>
-            <a:off x="5253609" y="6743638"/>
-            <a:ext cx="564127" cy="113400"/>
+            <a:off x="4910338" y="6743638"/>
+            <a:ext cx="621252" cy="113400"/>
           </a:xfrm>
           <a:prstGeom prst="rect">
             <a:avLst/>
@@ -5193,7 +5193,7 @@
                 </a:solidFill>
                 <a:latin typeface="Versos"/>
               </a:rPr>
-              <a:t>Ações </a:t>
+              <a:t>Padrão </a:t>
             </a:r>
             <a:r>
               <a:rPr sz="744" b="1" i="0">
@@ -5202,7 +5202,7 @@
                 </a:solidFill>
                 <a:latin typeface="Versos"/>
               </a:rPr>
-              <a:t>1,9%</a:t>
+              <a:t>2,0%</a:t>
             </a:r>
           </a:p>
         </p:txBody>

--- a/AutomaTivio/saida/2026-08/pptx/Tivio ALT Light - Relatório de Gestão - Agosto 2026.pptx
+++ b/AutomaTivio/saida/2026-08/pptx/Tivio ALT Light - Relatório de Gestão - Agosto 2026.pptx
@@ -4621,7 +4621,7 @@
         <p:spPr>
           <a:xfrm>
             <a:off x="498960" y="6231211"/>
-            <a:ext cx="2665476" cy="151200"/>
+            <a:ext cx="2665845" cy="151200"/>
           </a:xfrm>
           <a:prstGeom prst="rect">
             <a:avLst/>
@@ -4658,7 +4658,7 @@
         <p:spPr>
           <a:xfrm>
             <a:off x="498960" y="6387609"/>
-            <a:ext cx="2665476" cy="189000"/>
+            <a:ext cx="2665845" cy="189000"/>
           </a:xfrm>
           <a:prstGeom prst="rect">
             <a:avLst/>
@@ -4694,8 +4694,8 @@
         </p:nvSpPr>
         <p:spPr>
           <a:xfrm>
-            <a:off x="3258478" y="6089934"/>
-            <a:ext cx="1552871" cy="292477"/>
+            <a:off x="3258832" y="6089934"/>
+            <a:ext cx="1553107" cy="292477"/>
           </a:xfrm>
           <a:prstGeom prst="rect">
             <a:avLst/>
@@ -4747,8 +4747,8 @@
         </p:nvSpPr>
         <p:spPr>
           <a:xfrm>
-            <a:off x="3258478" y="6387609"/>
-            <a:ext cx="1614986" cy="189000"/>
+            <a:off x="3258832" y="6387609"/>
+            <a:ext cx="1615231" cy="189000"/>
           </a:xfrm>
           <a:prstGeom prst="rect">
             <a:avLst/>
@@ -4784,8 +4784,8 @@
         </p:nvSpPr>
         <p:spPr>
           <a:xfrm>
-            <a:off x="5008027" y="6089934"/>
-            <a:ext cx="1400962" cy="292477"/>
+            <a:off x="5008500" y="6089934"/>
+            <a:ext cx="1400490" cy="292477"/>
           </a:xfrm>
           <a:prstGeom prst="rect">
             <a:avLst/>
@@ -4808,7 +4808,7 @@
                 </a:solidFill>
                 <a:latin typeface="Versos"/>
               </a:rPr>
-              <a:t>FIDC</a:t>
+              <a:t>FIDCs</a:t>
             </a:r>
           </a:p>
           <a:p>
@@ -4824,7 +4824,7 @@
                 </a:solidFill>
                 <a:latin typeface="Versos"/>
               </a:rPr>
-              <a:t>Sênior</a:t>
+              <a:t>Cota Sênior</a:t>
             </a:r>
           </a:p>
         </p:txBody>
@@ -4837,8 +4837,8 @@
         </p:nvSpPr>
         <p:spPr>
           <a:xfrm>
-            <a:off x="5008027" y="6387609"/>
-            <a:ext cx="1457001" cy="189000"/>
+            <a:off x="5008500" y="6387609"/>
+            <a:ext cx="1456509" cy="189000"/>
           </a:xfrm>
           <a:prstGeom prst="rect">
             <a:avLst/>
@@ -4874,8 +4874,8 @@
         </p:nvSpPr>
         <p:spPr>
           <a:xfrm>
-            <a:off x="6559481" y="6074223"/>
-            <a:ext cx="569532" cy="105840"/>
+            <a:off x="6559363" y="6086863"/>
+            <a:ext cx="569655" cy="105840"/>
           </a:xfrm>
           <a:prstGeom prst="rect">
             <a:avLst/>
@@ -4911,31 +4911,31 @@
         </p:nvSpPr>
         <p:spPr>
           <a:xfrm>
-            <a:off x="6559481" y="6182308"/>
-            <a:ext cx="569532" cy="173880"/>
-          </a:xfrm>
-          <a:prstGeom prst="rect">
-            <a:avLst/>
-          </a:prstGeom>
-          <a:noFill/>
-        </p:spPr>
-        <p:txBody>
-          <a:bodyPr wrap="none" lIns="0" rIns="0" tIns="0" bIns="0" anchor="t"/>
-          <a:lstStyle/>
-          <a:p>
-            <a:pPr algn="l">
-              <a:lnSpc>
-                <a:spcPts val="1211"/>
-              </a:lnSpc>
-            </a:pPr>
-            <a:r>
-              <a:rPr sz="1101" b="1" i="0">
+            <a:off x="6559363" y="6194947"/>
+            <a:ext cx="569655" cy="173880"/>
+          </a:xfrm>
+          <a:prstGeom prst="rect">
+            <a:avLst/>
+          </a:prstGeom>
+          <a:noFill/>
+        </p:spPr>
+        <p:txBody>
+          <a:bodyPr wrap="none" lIns="0" rIns="0" tIns="0" bIns="0" anchor="t"/>
+          <a:lstStyle/>
+          <a:p>
+            <a:pPr algn="l">
+              <a:lnSpc>
+                <a:spcPts val="1217"/>
+              </a:lnSpc>
+            </a:pPr>
+            <a:r>
+              <a:rPr sz="1107" b="1" i="0">
                 <a:solidFill>
                   <a:srgbClr val="2B3744"/>
                 </a:solidFill>
                 <a:latin typeface="Versos"/>
               </a:rPr>
-              <a:t>7,7%</a:t>
+              <a:t>7,8%</a:t>
             </a:r>
           </a:p>
         </p:txBody>
@@ -4948,31 +4948,31 @@
         </p:nvSpPr>
         <p:spPr>
           <a:xfrm>
-            <a:off x="6559481" y="6506797"/>
-            <a:ext cx="569532" cy="113400"/>
-          </a:xfrm>
-          <a:prstGeom prst="rect">
-            <a:avLst/>
-          </a:prstGeom>
-          <a:noFill/>
-        </p:spPr>
-        <p:txBody>
-          <a:bodyPr wrap="none" lIns="0" rIns="0" tIns="0" bIns="0" anchor="t"/>
-          <a:lstStyle/>
-          <a:p>
-            <a:pPr algn="l">
-              <a:lnSpc>
-                <a:spcPts val="798"/>
-              </a:lnSpc>
-            </a:pPr>
-            <a:r>
-              <a:rPr sz="726" b="1" i="0">
+            <a:off x="6559363" y="6511876"/>
+            <a:ext cx="569655" cy="105840"/>
+          </a:xfrm>
+          <a:prstGeom prst="rect">
+            <a:avLst/>
+          </a:prstGeom>
+          <a:noFill/>
+        </p:spPr>
+        <p:txBody>
+          <a:bodyPr wrap="none" lIns="0" rIns="0" tIns="0" bIns="0" anchor="t"/>
+          <a:lstStyle/>
+          <a:p>
+            <a:pPr algn="l">
+              <a:lnSpc>
+                <a:spcPts val="759"/>
+              </a:lnSpc>
+            </a:pPr>
+            <a:r>
+              <a:rPr sz="690" b="1" i="0">
                 <a:solidFill>
                   <a:srgbClr val="FFFFFF"/>
                 </a:solidFill>
                 <a:latin typeface="Versos"/>
               </a:rPr>
-              <a:t>2,0%</a:t>
+              <a:t>1,9%</a:t>
             </a:r>
           </a:p>
         </p:txBody>
@@ -5078,7 +5078,7 @@
         <p:spPr>
           <a:xfrm>
             <a:off x="2845158" y="6743638"/>
-            <a:ext cx="928746" cy="113400"/>
+            <a:ext cx="1226780" cy="113400"/>
           </a:xfrm>
           <a:prstGeom prst="rect">
             <a:avLst/>
@@ -5101,7 +5101,7 @@
                 </a:solidFill>
                 <a:latin typeface="Versos"/>
               </a:rPr>
-              <a:t>FIDC Sênior </a:t>
+              <a:t>FIDCs Cota Sênior </a:t>
             </a:r>
             <a:r>
               <a:rPr sz="744" b="1" i="0">
@@ -5123,8 +5123,8 @@
         </p:nvSpPr>
         <p:spPr>
           <a:xfrm>
-            <a:off x="4002783" y="6743638"/>
-            <a:ext cx="668672" cy="113400"/>
+            <a:off x="4289355" y="6743638"/>
+            <a:ext cx="676657" cy="113400"/>
           </a:xfrm>
           <a:prstGeom prst="rect">
             <a:avLst/>
@@ -5156,7 +5156,7 @@
                 </a:solidFill>
                 <a:latin typeface="Versos"/>
               </a:rPr>
-              <a:t>7,7%</a:t>
+              <a:t>7,8%</a:t>
             </a:r>
           </a:p>
         </p:txBody>
@@ -5169,8 +5169,8 @@
         </p:nvSpPr>
         <p:spPr>
           <a:xfrm>
-            <a:off x="4910338" y="6743638"/>
-            <a:ext cx="621252" cy="113400"/>
+            <a:off x="5204587" y="6743638"/>
+            <a:ext cx="441768" cy="113400"/>
           </a:xfrm>
           <a:prstGeom prst="rect">
             <a:avLst/>
@@ -5193,7 +5193,7 @@
                 </a:solidFill>
                 <a:latin typeface="Versos"/>
               </a:rPr>
-              <a:t>Padrão </a:t>
+              <a:t>FIP </a:t>
             </a:r>
             <a:r>
               <a:rPr sz="744" b="1" i="0">
@@ -5202,7 +5202,7 @@
                 </a:solidFill>
                 <a:latin typeface="Versos"/>
               </a:rPr>
-              <a:t>2,0%</a:t>
+              <a:t>1,9%</a:t>
             </a:r>
           </a:p>
         </p:txBody>

--- a/AutomaTivio/saida/2026-08/pptx/Tivio ALT Light - Relatório de Gestão - Agosto 2026.pptx
+++ b/AutomaTivio/saida/2026-08/pptx/Tivio ALT Light - Relatório de Gestão - Agosto 2026.pptx
@@ -4694,16 +4694,16 @@
         </p:nvSpPr>
         <p:spPr>
           <a:xfrm>
-            <a:off x="3258832" y="6089934"/>
-            <a:ext cx="1553107" cy="292477"/>
-          </a:xfrm>
-          <a:prstGeom prst="rect">
-            <a:avLst/>
-          </a:prstGeom>
-          <a:noFill/>
-        </p:spPr>
-        <p:txBody>
-          <a:bodyPr wrap="square" lIns="0" rIns="0" tIns="0" bIns="0" anchor="t"/>
+            <a:off x="3258832" y="6231211"/>
+            <a:ext cx="1615231" cy="151200"/>
+          </a:xfrm>
+          <a:prstGeom prst="rect">
+            <a:avLst/>
+          </a:prstGeom>
+          <a:noFill/>
+        </p:spPr>
+        <p:txBody>
+          <a:bodyPr wrap="none" lIns="0" rIns="0" tIns="0" bIns="0" anchor="t"/>
           <a:lstStyle/>
           <a:p>
             <a:pPr algn="l">
@@ -4718,23 +4718,7 @@
                 </a:solidFill>
                 <a:latin typeface="Versos"/>
               </a:rPr>
-              <a:t>Crédito</a:t>
-            </a:r>
-          </a:p>
-          <a:p>
-            <a:pPr algn="l">
-              <a:lnSpc>
-                <a:spcPts val="1113"/>
-              </a:lnSpc>
-            </a:pPr>
-            <a:r>
-              <a:rPr sz="1012" b="1" i="0">
-                <a:solidFill>
-                  <a:srgbClr val="FFFFFF"/>
-                </a:solidFill>
-                <a:latin typeface="Versos"/>
-              </a:rPr>
-              <a:t>Privado</a:t>
+              <a:t>Debêntures</a:t>
             </a:r>
           </a:p>
         </p:txBody>
@@ -5032,7 +5016,7 @@
         <p:spPr>
           <a:xfrm>
             <a:off x="1538578" y="6743638"/>
-            <a:ext cx="1083659" cy="113400"/>
+            <a:ext cx="904790" cy="113400"/>
           </a:xfrm>
           <a:prstGeom prst="rect">
             <a:avLst/>
@@ -5055,7 +5039,7 @@
                 </a:solidFill>
                 <a:latin typeface="Versos"/>
               </a:rPr>
-              <a:t>Crédito Privado </a:t>
+              <a:t>Debêntures </a:t>
             </a:r>
             <a:r>
               <a:rPr sz="744" b="1" i="0">
@@ -5077,7 +5061,7 @@
         </p:nvSpPr>
         <p:spPr>
           <a:xfrm>
-            <a:off x="2845158" y="6743638"/>
+            <a:off x="2673168" y="6743638"/>
             <a:ext cx="1226780" cy="113400"/>
           </a:xfrm>
           <a:prstGeom prst="rect">
@@ -5123,7 +5107,7 @@
         </p:nvSpPr>
         <p:spPr>
           <a:xfrm>
-            <a:off x="4289355" y="6743638"/>
+            <a:off x="4117365" y="6743638"/>
             <a:ext cx="676657" cy="113400"/>
           </a:xfrm>
           <a:prstGeom prst="rect">
@@ -5169,7 +5153,7 @@
         </p:nvSpPr>
         <p:spPr>
           <a:xfrm>
-            <a:off x="5204587" y="6743638"/>
+            <a:off x="5032597" y="6743638"/>
             <a:ext cx="441768" cy="113400"/>
           </a:xfrm>
           <a:prstGeom prst="rect">

--- a/AutomaTivio/saida/2026-08/pptx/Tivio ALT Light - Relatório de Gestão - Agosto 2026.pptx
+++ b/AutomaTivio/saida/2026-08/pptx/Tivio ALT Light - Relatório de Gestão - Agosto 2026.pptx
@@ -4932,30 +4932,67 @@
         </p:nvSpPr>
         <p:spPr>
           <a:xfrm>
-            <a:off x="6559363" y="6511876"/>
-            <a:ext cx="569655" cy="105840"/>
-          </a:xfrm>
-          <a:prstGeom prst="rect">
-            <a:avLst/>
-          </a:prstGeom>
-          <a:noFill/>
-        </p:spPr>
-        <p:txBody>
-          <a:bodyPr wrap="none" lIns="0" rIns="0" tIns="0" bIns="0" anchor="t"/>
-          <a:lstStyle/>
-          <a:p>
-            <a:pPr algn="l">
-              <a:lnSpc>
-                <a:spcPts val="759"/>
-              </a:lnSpc>
-            </a:pPr>
-            <a:r>
-              <a:rPr sz="690" b="1" i="0">
+            <a:off x="6560190" y="6472423"/>
+            <a:ext cx="205282" cy="136080"/>
+          </a:xfrm>
+          <a:prstGeom prst="rect">
+            <a:avLst/>
+          </a:prstGeom>
+          <a:noFill/>
+        </p:spPr>
+        <p:txBody>
+          <a:bodyPr wrap="none" lIns="0" rIns="0" tIns="0" bIns="0" anchor="t"/>
+          <a:lstStyle/>
+          <a:p>
+            <a:pPr algn="l">
+              <a:lnSpc>
+                <a:spcPts val="982"/>
+              </a:lnSpc>
+            </a:pPr>
+            <a:r>
+              <a:rPr sz="892" b="0" i="0">
                 <a:solidFill>
                   <a:srgbClr val="FFFFFF"/>
                 </a:solidFill>
                 <a:latin typeface="Versos"/>
               </a:rPr>
+              <a:t>FIP</a:t>
+            </a:r>
+          </a:p>
+        </p:txBody>
+      </p:sp>
+      <p:sp>
+        <p:nvSpPr>
+          <p:cNvPr id="52" name="TextBox 51"/>
+          <p:cNvSpPr txBox="1"/>
+          <p:nvPr/>
+        </p:nvSpPr>
+        <p:spPr>
+          <a:xfrm>
+            <a:off x="6797266" y="6470533"/>
+            <a:ext cx="268304" cy="136080"/>
+          </a:xfrm>
+          <a:prstGeom prst="rect">
+            <a:avLst/>
+          </a:prstGeom>
+          <a:noFill/>
+        </p:spPr>
+        <p:txBody>
+          <a:bodyPr wrap="none" lIns="0" rIns="0" tIns="0" bIns="0" anchor="t"/>
+          <a:lstStyle/>
+          <a:p>
+            <a:pPr algn="l">
+              <a:lnSpc>
+                <a:spcPts val="892"/>
+              </a:lnSpc>
+            </a:pPr>
+            <a:r>
+              <a:rPr sz="892" b="1" i="0">
+                <a:solidFill>
+                  <a:srgbClr val="FFFFFF"/>
+                </a:solidFill>
+                <a:latin typeface="Versos"/>
+              </a:rPr>
               <a:t>1,9%</a:t>
             </a:r>
           </a:p>
@@ -4963,7 +5000,7 @@
       </p:sp>
       <p:sp>
         <p:nvSpPr>
-          <p:cNvPr id="52" name="TextBox 51"/>
+          <p:cNvPr id="53" name="TextBox 52"/>
           <p:cNvSpPr txBox="1"/>
           <p:nvPr/>
         </p:nvSpPr>
@@ -5009,7 +5046,7 @@
       </p:sp>
       <p:sp>
         <p:nvSpPr>
-          <p:cNvPr id="53" name="TextBox 52"/>
+          <p:cNvPr id="54" name="TextBox 53"/>
           <p:cNvSpPr txBox="1"/>
           <p:nvPr/>
         </p:nvSpPr>
@@ -5055,7 +5092,7 @@
       </p:sp>
       <p:sp>
         <p:nvSpPr>
-          <p:cNvPr id="54" name="TextBox 53"/>
+          <p:cNvPr id="55" name="TextBox 54"/>
           <p:cNvSpPr txBox="1"/>
           <p:nvPr/>
         </p:nvSpPr>
@@ -5101,7 +5138,7 @@
       </p:sp>
       <p:sp>
         <p:nvSpPr>
-          <p:cNvPr id="55" name="TextBox 54"/>
+          <p:cNvPr id="56" name="TextBox 55"/>
           <p:cNvSpPr txBox="1"/>
           <p:nvPr/>
         </p:nvSpPr>
@@ -5147,7 +5184,7 @@
       </p:sp>
       <p:sp>
         <p:nvSpPr>
-          <p:cNvPr id="56" name="TextBox 55"/>
+          <p:cNvPr id="57" name="TextBox 56"/>
           <p:cNvSpPr txBox="1"/>
           <p:nvPr/>
         </p:nvSpPr>
@@ -5193,7 +5230,7 @@
       </p:sp>
       <p:sp>
         <p:nvSpPr>
-          <p:cNvPr id="57" name="TextBox 56"/>
+          <p:cNvPr id="58" name="TextBox 57"/>
           <p:cNvSpPr txBox="1"/>
           <p:nvPr/>
         </p:nvSpPr>
@@ -5230,7 +5267,7 @@
       </p:sp>
       <p:sp>
         <p:nvSpPr>
-          <p:cNvPr id="58" name="TextBox 57"/>
+          <p:cNvPr id="59" name="TextBox 58"/>
           <p:cNvSpPr txBox="1"/>
           <p:nvPr/>
         </p:nvSpPr>
@@ -5303,7 +5340,7 @@
       </p:sp>
       <p:sp>
         <p:nvSpPr>
-          <p:cNvPr id="59" name="TextBox 58"/>
+          <p:cNvPr id="60" name="TextBox 59"/>
           <p:cNvSpPr txBox="1"/>
           <p:nvPr/>
         </p:nvSpPr>
